--- a/Presentation/VOIS_Major_Project_PPT_Submission_Template_Gnaneswar.pptx
+++ b/Presentation/VOIS_Major_Project_PPT_Submission_Template_Gnaneswar.pptx
@@ -5,10 +5,10 @@
     <p:sldMasterId id="2147483747" r:id="rId4"/>
   </p:sldMasterIdLst>
   <p:notesMasterIdLst>
-    <p:notesMasterId r:id="rId23"/>
+    <p:notesMasterId r:id="rId24"/>
   </p:notesMasterIdLst>
   <p:handoutMasterIdLst>
-    <p:handoutMasterId r:id="rId24"/>
+    <p:handoutMasterId r:id="rId25"/>
   </p:handoutMasterIdLst>
   <p:sldIdLst>
     <p:sldId id="338" r:id="rId5"/>
@@ -18,17 +18,18 @@
     <p:sldId id="329" r:id="rId9"/>
     <p:sldId id="302" r:id="rId10"/>
     <p:sldId id="347" r:id="rId11"/>
-    <p:sldId id="339" r:id="rId12"/>
-    <p:sldId id="340" r:id="rId13"/>
-    <p:sldId id="344" r:id="rId14"/>
-    <p:sldId id="345" r:id="rId15"/>
-    <p:sldId id="346" r:id="rId16"/>
-    <p:sldId id="350" r:id="rId17"/>
-    <p:sldId id="341" r:id="rId18"/>
-    <p:sldId id="348" r:id="rId19"/>
-    <p:sldId id="342" r:id="rId20"/>
-    <p:sldId id="343" r:id="rId21"/>
-    <p:sldId id="304" r:id="rId22"/>
+    <p:sldId id="351" r:id="rId12"/>
+    <p:sldId id="339" r:id="rId13"/>
+    <p:sldId id="340" r:id="rId14"/>
+    <p:sldId id="344" r:id="rId15"/>
+    <p:sldId id="345" r:id="rId16"/>
+    <p:sldId id="346" r:id="rId17"/>
+    <p:sldId id="350" r:id="rId18"/>
+    <p:sldId id="341" r:id="rId19"/>
+    <p:sldId id="348" r:id="rId20"/>
+    <p:sldId id="342" r:id="rId21"/>
+    <p:sldId id="343" r:id="rId22"/>
+    <p:sldId id="304" r:id="rId23"/>
   </p:sldIdLst>
   <p:sldSz cx="12192000" cy="6858000"/>
   <p:notesSz cx="6858000" cy="9144000"/>
@@ -894,6 +895,114 @@
     <p:extLst>
       <p:ext uri="{BB962C8B-B14F-4D97-AF65-F5344CB8AC3E}">
         <p14:creationId xmlns:p14="http://schemas.microsoft.com/office/powerpoint/2010/main" val="434332262"/>
+      </p:ext>
+    </p:extLst>
+  </p:cSld>
+  <p:clrMapOvr>
+    <a:masterClrMapping/>
+  </p:clrMapOvr>
+</p:notes>
+</file>
+
+<file path=ppt/notesSlides/notesSlide3.xml><?xml version="1.0" encoding="utf-8"?>
+<p:notes xmlns:a="http://schemas.openxmlformats.org/drawingml/2006/main" xmlns:r="http://schemas.openxmlformats.org/officeDocument/2006/relationships" xmlns:p="http://schemas.openxmlformats.org/presentationml/2006/main">
+  <p:cSld>
+    <p:spTree>
+      <p:nvGrpSpPr>
+        <p:cNvPr id="1" name="">
+          <a:extLst>
+            <a:ext uri="{FF2B5EF4-FFF2-40B4-BE49-F238E27FC236}">
+              <a16:creationId xmlns:a16="http://schemas.microsoft.com/office/drawing/2014/main" id="{7BF27B31-767F-9374-9DD4-CD7881085E2C}"/>
+            </a:ext>
+          </a:extLst>
+        </p:cNvPr>
+        <p:cNvGrpSpPr/>
+        <p:nvPr/>
+      </p:nvGrpSpPr>
+      <p:grpSpPr>
+        <a:xfrm>
+          <a:off x="0" y="0"/>
+          <a:ext cx="0" cy="0"/>
+          <a:chOff x="0" y="0"/>
+          <a:chExt cx="0" cy="0"/>
+        </a:xfrm>
+      </p:grpSpPr>
+      <p:sp>
+        <p:nvSpPr>
+          <p:cNvPr id="2" name="Slide Image Placeholder 1">
+            <a:extLst>
+              <a:ext uri="{FF2B5EF4-FFF2-40B4-BE49-F238E27FC236}">
+                <a16:creationId xmlns:a16="http://schemas.microsoft.com/office/drawing/2014/main" id="{C7584057-44C0-5945-2061-35192CE82D0C}"/>
+              </a:ext>
+            </a:extLst>
+          </p:cNvPr>
+          <p:cNvSpPr>
+            <a:spLocks noGrp="1" noRot="1" noChangeAspect="1"/>
+          </p:cNvSpPr>
+          <p:nvPr>
+            <p:ph type="sldImg"/>
+          </p:nvPr>
+        </p:nvSpPr>
+        <p:spPr/>
+      </p:sp>
+      <p:sp>
+        <p:nvSpPr>
+          <p:cNvPr id="3" name="Notes Placeholder 2">
+            <a:extLst>
+              <a:ext uri="{FF2B5EF4-FFF2-40B4-BE49-F238E27FC236}">
+                <a16:creationId xmlns:a16="http://schemas.microsoft.com/office/drawing/2014/main" id="{4845FB29-9F09-9220-52FB-AE64786558E8}"/>
+              </a:ext>
+            </a:extLst>
+          </p:cNvPr>
+          <p:cNvSpPr>
+            <a:spLocks noGrp="1"/>
+          </p:cNvSpPr>
+          <p:nvPr>
+            <p:ph type="body" idx="1"/>
+          </p:nvPr>
+        </p:nvSpPr>
+        <p:spPr/>
+        <p:txBody>
+          <a:bodyPr/>
+          <a:lstStyle/>
+          <a:p>
+            <a:endParaRPr lang="en-US" dirty="0"/>
+          </a:p>
+        </p:txBody>
+      </p:sp>
+      <p:sp>
+        <p:nvSpPr>
+          <p:cNvPr id="4" name="Slide Number Placeholder 3">
+            <a:extLst>
+              <a:ext uri="{FF2B5EF4-FFF2-40B4-BE49-F238E27FC236}">
+                <a16:creationId xmlns:a16="http://schemas.microsoft.com/office/drawing/2014/main" id="{1161B4D0-8B80-41C8-B7B5-AFE2922D118F}"/>
+              </a:ext>
+            </a:extLst>
+          </p:cNvPr>
+          <p:cNvSpPr>
+            <a:spLocks noGrp="1"/>
+          </p:cNvSpPr>
+          <p:nvPr>
+            <p:ph type="sldNum" sz="quarter" idx="5"/>
+          </p:nvPr>
+        </p:nvSpPr>
+        <p:spPr/>
+        <p:txBody>
+          <a:bodyPr/>
+          <a:lstStyle/>
+          <a:p>
+            <a:fld id="{8530193B-564F-4854-8A52-728F3FB19C85}" type="slidenum">
+              <a:rPr lang="en-US" noProof="0" smtClean="0"/>
+              <a:t>8</a:t>
+            </a:fld>
+            <a:endParaRPr lang="en-US" noProof="0" dirty="0"/>
+          </a:p>
+        </p:txBody>
+      </p:sp>
+    </p:spTree>
+    <p:extLst>
+      <p:ext uri="{BB962C8B-B14F-4D97-AF65-F5344CB8AC3E}">
+        <p14:creationId xmlns:p14="http://schemas.microsoft.com/office/powerpoint/2010/main" val="1189462986"/>
       </p:ext>
     </p:extLst>
   </p:cSld>
@@ -11134,6 +11243,732 @@
         <p:cNvPr id="1" name="">
           <a:extLst>
             <a:ext uri="{FF2B5EF4-FFF2-40B4-BE49-F238E27FC236}">
+              <a16:creationId xmlns:a16="http://schemas.microsoft.com/office/drawing/2014/main" id="{B9EAAE43-B138-25CD-D01F-41DB388556CE}"/>
+            </a:ext>
+          </a:extLst>
+        </p:cNvPr>
+        <p:cNvGrpSpPr/>
+        <p:nvPr/>
+      </p:nvGrpSpPr>
+      <p:grpSpPr>
+        <a:xfrm>
+          <a:off x="0" y="0"/>
+          <a:ext cx="0" cy="0"/>
+          <a:chOff x="0" y="0"/>
+          <a:chExt cx="0" cy="0"/>
+        </a:xfrm>
+      </p:grpSpPr>
+      <p:pic>
+        <p:nvPicPr>
+          <p:cNvPr id="5" name="Picture 4">
+            <a:extLst>
+              <a:ext uri="{FF2B5EF4-FFF2-40B4-BE49-F238E27FC236}">
+                <a16:creationId xmlns:a16="http://schemas.microsoft.com/office/drawing/2014/main" id="{BFCF24DA-3CDC-4D87-9335-AB913C783F76}"/>
+              </a:ext>
+            </a:extLst>
+          </p:cNvPr>
+          <p:cNvPicPr>
+            <a:picLocks noChangeAspect="1"/>
+          </p:cNvPicPr>
+          <p:nvPr/>
+        </p:nvPicPr>
+        <p:blipFill rotWithShape="1">
+          <a:blip r:embed="rId2"/>
+          <a:srcRect t="96181"/>
+          <a:stretch/>
+        </p:blipFill>
+        <p:spPr>
+          <a:xfrm>
+            <a:off x="675957" y="6471920"/>
+            <a:ext cx="2143125" cy="193040"/>
+          </a:xfrm>
+          <a:prstGeom prst="rect">
+            <a:avLst/>
+          </a:prstGeom>
+        </p:spPr>
+      </p:pic>
+      <p:sp>
+        <p:nvSpPr>
+          <p:cNvPr id="4" name="Title 3">
+            <a:extLst>
+              <a:ext uri="{FF2B5EF4-FFF2-40B4-BE49-F238E27FC236}">
+                <a16:creationId xmlns:a16="http://schemas.microsoft.com/office/drawing/2014/main" id="{6D5AF756-BADB-9E87-14AC-F87A8C7463BF}"/>
+              </a:ext>
+            </a:extLst>
+          </p:cNvPr>
+          <p:cNvSpPr>
+            <a:spLocks noGrp="1"/>
+          </p:cNvSpPr>
+          <p:nvPr>
+            <p:ph type="title"/>
+          </p:nvPr>
+        </p:nvSpPr>
+        <p:spPr>
+          <a:xfrm>
+            <a:off x="675957" y="370589"/>
+            <a:ext cx="2981643" cy="830997"/>
+          </a:xfrm>
+        </p:spPr>
+        <p:txBody>
+          <a:bodyPr>
+            <a:normAutofit/>
+          </a:bodyPr>
+          <a:lstStyle/>
+          <a:p>
+            <a:r>
+              <a:rPr lang="en-GB" dirty="0"/>
+              <a:t>RESULTS </a:t>
+            </a:r>
+            <a:endParaRPr lang="en-IN" dirty="0"/>
+          </a:p>
+        </p:txBody>
+      </p:sp>
+      <p:sp>
+        <p:nvSpPr>
+          <p:cNvPr id="8" name="Text Placeholder 30">
+            <a:extLst>
+              <a:ext uri="{FF2B5EF4-FFF2-40B4-BE49-F238E27FC236}">
+                <a16:creationId xmlns:a16="http://schemas.microsoft.com/office/drawing/2014/main" id="{0E149068-B429-662F-714A-0DD8CE171A51}"/>
+              </a:ext>
+            </a:extLst>
+          </p:cNvPr>
+          <p:cNvSpPr txBox="1">
+            <a:spLocks/>
+          </p:cNvSpPr>
+          <p:nvPr/>
+        </p:nvSpPr>
+        <p:spPr>
+          <a:xfrm>
+            <a:off x="4345694" y="1275371"/>
+            <a:ext cx="3343561" cy="666078"/>
+          </a:xfrm>
+          <a:prstGeom prst="rect">
+            <a:avLst/>
+          </a:prstGeom>
+        </p:spPr>
+        <p:txBody>
+          <a:bodyPr vert="horz" lIns="91440" tIns="45720" rIns="91440" bIns="45720" rtlCol="0">
+            <a:normAutofit/>
+          </a:bodyPr>
+          <a:lstStyle>
+            <a:lvl1pPr marL="0" indent="0" algn="ctr" defTabSz="457200" rtl="0" eaLnBrk="1" latinLnBrk="0" hangingPunct="1">
+              <a:spcBef>
+                <a:spcPts val="1000"/>
+              </a:spcBef>
+              <a:spcAft>
+                <a:spcPts val="0"/>
+              </a:spcAft>
+              <a:buClr>
+                <a:schemeClr val="accent1"/>
+              </a:buClr>
+              <a:buSzPct val="80000"/>
+              <a:buFont typeface="Wingdings 3" charset="2"/>
+              <a:buNone/>
+              <a:defRPr lang="en-US" sz="1600" kern="1200" dirty="0" smtClean="0">
+                <a:solidFill>
+                  <a:schemeClr val="tx1"/>
+                </a:solidFill>
+                <a:latin typeface="+mn-lt"/>
+                <a:ea typeface="+mn-ea"/>
+                <a:cs typeface="+mn-cs"/>
+              </a:defRPr>
+            </a:lvl1pPr>
+            <a:lvl2pPr marL="742950" indent="-285750" algn="l" defTabSz="457200" rtl="0" eaLnBrk="1" latinLnBrk="0" hangingPunct="1">
+              <a:spcBef>
+                <a:spcPts val="1000"/>
+              </a:spcBef>
+              <a:spcAft>
+                <a:spcPts val="0"/>
+              </a:spcAft>
+              <a:buClr>
+                <a:schemeClr val="accent1"/>
+              </a:buClr>
+              <a:buSzPct val="80000"/>
+              <a:buFont typeface="Wingdings 3" charset="2"/>
+              <a:buChar char=""/>
+              <a:defRPr sz="1600" kern="1200">
+                <a:solidFill>
+                  <a:schemeClr val="tx1">
+                    <a:lumMod val="75000"/>
+                    <a:lumOff val="25000"/>
+                  </a:schemeClr>
+                </a:solidFill>
+                <a:latin typeface="+mn-lt"/>
+                <a:ea typeface="+mn-ea"/>
+                <a:cs typeface="+mn-cs"/>
+              </a:defRPr>
+            </a:lvl2pPr>
+            <a:lvl3pPr marL="1143000" indent="-228600" algn="l" defTabSz="457200" rtl="0" eaLnBrk="1" latinLnBrk="0" hangingPunct="1">
+              <a:spcBef>
+                <a:spcPts val="1000"/>
+              </a:spcBef>
+              <a:spcAft>
+                <a:spcPts val="0"/>
+              </a:spcAft>
+              <a:buClr>
+                <a:schemeClr val="accent1"/>
+              </a:buClr>
+              <a:buSzPct val="80000"/>
+              <a:buFont typeface="Wingdings 3" charset="2"/>
+              <a:buChar char=""/>
+              <a:defRPr sz="1400" kern="1200">
+                <a:solidFill>
+                  <a:schemeClr val="tx1">
+                    <a:lumMod val="75000"/>
+                    <a:lumOff val="25000"/>
+                  </a:schemeClr>
+                </a:solidFill>
+                <a:latin typeface="+mn-lt"/>
+                <a:ea typeface="+mn-ea"/>
+                <a:cs typeface="+mn-cs"/>
+              </a:defRPr>
+            </a:lvl3pPr>
+            <a:lvl4pPr marL="1600200" indent="-228600" algn="l" defTabSz="457200" rtl="0" eaLnBrk="1" latinLnBrk="0" hangingPunct="1">
+              <a:spcBef>
+                <a:spcPts val="1000"/>
+              </a:spcBef>
+              <a:spcAft>
+                <a:spcPts val="0"/>
+              </a:spcAft>
+              <a:buClr>
+                <a:schemeClr val="accent1"/>
+              </a:buClr>
+              <a:buSzPct val="80000"/>
+              <a:buFont typeface="Wingdings 3" charset="2"/>
+              <a:buChar char=""/>
+              <a:defRPr sz="1200" kern="1200">
+                <a:solidFill>
+                  <a:schemeClr val="tx1">
+                    <a:lumMod val="75000"/>
+                    <a:lumOff val="25000"/>
+                  </a:schemeClr>
+                </a:solidFill>
+                <a:latin typeface="+mn-lt"/>
+                <a:ea typeface="+mn-ea"/>
+                <a:cs typeface="+mn-cs"/>
+              </a:defRPr>
+            </a:lvl4pPr>
+            <a:lvl5pPr marL="2057400" indent="-228600" algn="l" defTabSz="457200" rtl="0" eaLnBrk="1" latinLnBrk="0" hangingPunct="1">
+              <a:spcBef>
+                <a:spcPts val="1000"/>
+              </a:spcBef>
+              <a:spcAft>
+                <a:spcPts val="0"/>
+              </a:spcAft>
+              <a:buClr>
+                <a:schemeClr val="accent1"/>
+              </a:buClr>
+              <a:buSzPct val="80000"/>
+              <a:buFont typeface="Wingdings 3" charset="2"/>
+              <a:buChar char=""/>
+              <a:defRPr sz="1200" kern="1200">
+                <a:solidFill>
+                  <a:schemeClr val="tx1">
+                    <a:lumMod val="75000"/>
+                    <a:lumOff val="25000"/>
+                  </a:schemeClr>
+                </a:solidFill>
+                <a:latin typeface="+mn-lt"/>
+                <a:ea typeface="+mn-ea"/>
+                <a:cs typeface="+mn-cs"/>
+              </a:defRPr>
+            </a:lvl5pPr>
+            <a:lvl6pPr marL="2514600" indent="-228600" algn="l" defTabSz="457200" rtl="0" eaLnBrk="1" latinLnBrk="0" hangingPunct="1">
+              <a:spcBef>
+                <a:spcPts val="1000"/>
+              </a:spcBef>
+              <a:spcAft>
+                <a:spcPts val="0"/>
+              </a:spcAft>
+              <a:buClr>
+                <a:schemeClr val="accent1"/>
+              </a:buClr>
+              <a:buSzPct val="80000"/>
+              <a:buFont typeface="Wingdings 3" charset="2"/>
+              <a:buChar char=""/>
+              <a:defRPr sz="1200" kern="1200">
+                <a:solidFill>
+                  <a:schemeClr val="tx1">
+                    <a:lumMod val="75000"/>
+                    <a:lumOff val="25000"/>
+                  </a:schemeClr>
+                </a:solidFill>
+                <a:latin typeface="+mn-lt"/>
+                <a:ea typeface="+mn-ea"/>
+                <a:cs typeface="+mn-cs"/>
+              </a:defRPr>
+            </a:lvl6pPr>
+            <a:lvl7pPr marL="2971800" indent="-228600" algn="l" defTabSz="457200" rtl="0" eaLnBrk="1" latinLnBrk="0" hangingPunct="1">
+              <a:spcBef>
+                <a:spcPts val="1000"/>
+              </a:spcBef>
+              <a:spcAft>
+                <a:spcPts val="0"/>
+              </a:spcAft>
+              <a:buClr>
+                <a:schemeClr val="accent1"/>
+              </a:buClr>
+              <a:buSzPct val="80000"/>
+              <a:buFont typeface="Wingdings 3" charset="2"/>
+              <a:buChar char=""/>
+              <a:defRPr sz="1200" kern="1200">
+                <a:solidFill>
+                  <a:schemeClr val="tx1">
+                    <a:lumMod val="75000"/>
+                    <a:lumOff val="25000"/>
+                  </a:schemeClr>
+                </a:solidFill>
+                <a:latin typeface="+mn-lt"/>
+                <a:ea typeface="+mn-ea"/>
+                <a:cs typeface="+mn-cs"/>
+              </a:defRPr>
+            </a:lvl7pPr>
+            <a:lvl8pPr marL="3429000" indent="-228600" algn="l" defTabSz="457200" rtl="0" eaLnBrk="1" latinLnBrk="0" hangingPunct="1">
+              <a:spcBef>
+                <a:spcPts val="1000"/>
+              </a:spcBef>
+              <a:spcAft>
+                <a:spcPts val="0"/>
+              </a:spcAft>
+              <a:buClr>
+                <a:schemeClr val="accent1"/>
+              </a:buClr>
+              <a:buSzPct val="80000"/>
+              <a:buFont typeface="Wingdings 3" charset="2"/>
+              <a:buChar char=""/>
+              <a:defRPr sz="1200" kern="1200">
+                <a:solidFill>
+                  <a:schemeClr val="tx1">
+                    <a:lumMod val="75000"/>
+                    <a:lumOff val="25000"/>
+                  </a:schemeClr>
+                </a:solidFill>
+                <a:latin typeface="+mn-lt"/>
+                <a:ea typeface="+mn-ea"/>
+                <a:cs typeface="+mn-cs"/>
+              </a:defRPr>
+            </a:lvl8pPr>
+            <a:lvl9pPr marL="3886200" indent="-228600" algn="l" defTabSz="457200" rtl="0" eaLnBrk="1" latinLnBrk="0" hangingPunct="1">
+              <a:spcBef>
+                <a:spcPts val="1000"/>
+              </a:spcBef>
+              <a:spcAft>
+                <a:spcPts val="0"/>
+              </a:spcAft>
+              <a:buClr>
+                <a:schemeClr val="accent1"/>
+              </a:buClr>
+              <a:buSzPct val="80000"/>
+              <a:buFont typeface="Wingdings 3" charset="2"/>
+              <a:buChar char=""/>
+              <a:defRPr sz="1200" kern="1200">
+                <a:solidFill>
+                  <a:schemeClr val="tx1">
+                    <a:lumMod val="75000"/>
+                    <a:lumOff val="25000"/>
+                  </a:schemeClr>
+                </a:solidFill>
+                <a:latin typeface="+mn-lt"/>
+                <a:ea typeface="+mn-ea"/>
+                <a:cs typeface="+mn-cs"/>
+              </a:defRPr>
+            </a:lvl9pPr>
+          </a:lstStyle>
+          <a:p>
+            <a:endParaRPr lang="en-GB" sz="2000" dirty="0"/>
+          </a:p>
+        </p:txBody>
+      </p:sp>
+      <p:pic>
+        <p:nvPicPr>
+          <p:cNvPr id="15" name="Picture 14">
+            <a:extLst>
+              <a:ext uri="{FF2B5EF4-FFF2-40B4-BE49-F238E27FC236}">
+                <a16:creationId xmlns:a16="http://schemas.microsoft.com/office/drawing/2014/main" id="{1DCBA495-6A60-126C-95E3-D6C64882C415}"/>
+              </a:ext>
+            </a:extLst>
+          </p:cNvPr>
+          <p:cNvPicPr>
+            <a:picLocks noChangeAspect="1"/>
+          </p:cNvPicPr>
+          <p:nvPr/>
+        </p:nvPicPr>
+        <p:blipFill>
+          <a:blip r:embed="rId3"/>
+          <a:srcRect r="65494" b="50092"/>
+          <a:stretch>
+            <a:fillRect/>
+          </a:stretch>
+        </p:blipFill>
+        <p:spPr>
+          <a:xfrm>
+            <a:off x="341358" y="1539473"/>
+            <a:ext cx="4502021" cy="4114877"/>
+          </a:xfrm>
+          <a:prstGeom prst="rect">
+            <a:avLst/>
+          </a:prstGeom>
+        </p:spPr>
+      </p:pic>
+      <p:pic>
+        <p:nvPicPr>
+          <p:cNvPr id="16" name="Picture 15">
+            <a:extLst>
+              <a:ext uri="{FF2B5EF4-FFF2-40B4-BE49-F238E27FC236}">
+                <a16:creationId xmlns:a16="http://schemas.microsoft.com/office/drawing/2014/main" id="{F3AD0B17-18D9-6090-3E04-BEAE2629A8FF}"/>
+              </a:ext>
+            </a:extLst>
+          </p:cNvPr>
+          <p:cNvPicPr>
+            <a:picLocks noChangeAspect="1"/>
+          </p:cNvPicPr>
+          <p:nvPr/>
+        </p:nvPicPr>
+        <p:blipFill>
+          <a:blip r:embed="rId3"/>
+          <a:srcRect l="33996" r="32662" b="50092"/>
+          <a:stretch>
+            <a:fillRect/>
+          </a:stretch>
+        </p:blipFill>
+        <p:spPr>
+          <a:xfrm>
+            <a:off x="5141933" y="1539473"/>
+            <a:ext cx="4413380" cy="4114877"/>
+          </a:xfrm>
+          <a:prstGeom prst="rect">
+            <a:avLst/>
+          </a:prstGeom>
+        </p:spPr>
+      </p:pic>
+      <p:sp>
+        <p:nvSpPr>
+          <p:cNvPr id="17" name="TextBox 16">
+            <a:extLst>
+              <a:ext uri="{FF2B5EF4-FFF2-40B4-BE49-F238E27FC236}">
+                <a16:creationId xmlns:a16="http://schemas.microsoft.com/office/drawing/2014/main" id="{E04A0BFC-9583-C368-8F55-19AFC5F83327}"/>
+              </a:ext>
+            </a:extLst>
+          </p:cNvPr>
+          <p:cNvSpPr txBox="1"/>
+          <p:nvPr/>
+        </p:nvSpPr>
+        <p:spPr>
+          <a:xfrm>
+            <a:off x="675957" y="5728997"/>
+            <a:ext cx="4042417" cy="923330"/>
+          </a:xfrm>
+          <a:prstGeom prst="rect">
+            <a:avLst/>
+          </a:prstGeom>
+          <a:noFill/>
+        </p:spPr>
+        <p:txBody>
+          <a:bodyPr wrap="square" rtlCol="0">
+            <a:spAutoFit/>
+          </a:bodyPr>
+          <a:lstStyle/>
+          <a:p>
+            <a:r>
+              <a:rPr lang="en-IN"/>
+              <a:t>Box plot of Seasonal Rainfall (mm) showing median, interquartile range (IQR), and mean markers.</a:t>
+            </a:r>
+          </a:p>
+        </p:txBody>
+      </p:sp>
+      <p:sp>
+        <p:nvSpPr>
+          <p:cNvPr id="18" name="TextBox 17">
+            <a:extLst>
+              <a:ext uri="{FF2B5EF4-FFF2-40B4-BE49-F238E27FC236}">
+                <a16:creationId xmlns:a16="http://schemas.microsoft.com/office/drawing/2014/main" id="{CD50CE3B-00FC-9760-5FC7-EFD2978A333D}"/>
+              </a:ext>
+            </a:extLst>
+          </p:cNvPr>
+          <p:cNvSpPr txBox="1"/>
+          <p:nvPr/>
+        </p:nvSpPr>
+        <p:spPr>
+          <a:xfrm>
+            <a:off x="5219785" y="5728997"/>
+            <a:ext cx="4257675" cy="923330"/>
+          </a:xfrm>
+          <a:prstGeom prst="rect">
+            <a:avLst/>
+          </a:prstGeom>
+          <a:noFill/>
+        </p:spPr>
+        <p:txBody>
+          <a:bodyPr wrap="square" rtlCol="0">
+            <a:spAutoFit/>
+          </a:bodyPr>
+          <a:lstStyle/>
+          <a:p>
+            <a:r>
+              <a:rPr lang="en-IN"/>
+              <a:t>Box plot of Seasonal Average Temperature (°C) across Kharif, Rabi, and Zaid.</a:t>
+            </a:r>
+          </a:p>
+        </p:txBody>
+      </p:sp>
+    </p:spTree>
+    <p:extLst>
+      <p:ext uri="{BB962C8B-B14F-4D97-AF65-F5344CB8AC3E}">
+        <p14:creationId xmlns:p14="http://schemas.microsoft.com/office/powerpoint/2010/main" val="3849627828"/>
+      </p:ext>
+    </p:extLst>
+  </p:cSld>
+  <p:clrMapOvr>
+    <a:masterClrMapping/>
+  </p:clrMapOvr>
+  <p:timing>
+    <p:tnLst>
+      <p:par>
+        <p:cTn id="1" dur="indefinite" restart="never" nodeType="tmRoot">
+          <p:childTnLst>
+            <p:seq concurrent="1" nextAc="seek">
+              <p:cTn id="2" dur="indefinite" nodeType="mainSeq">
+                <p:childTnLst>
+                  <p:par>
+                    <p:cTn id="3" fill="hold">
+                      <p:stCondLst>
+                        <p:cond delay="indefinite"/>
+                      </p:stCondLst>
+                      <p:childTnLst>
+                        <p:par>
+                          <p:cTn id="4" fill="hold">
+                            <p:stCondLst>
+                              <p:cond delay="0"/>
+                            </p:stCondLst>
+                            <p:childTnLst>
+                              <p:par>
+                                <p:cTn id="5" presetID="53" presetClass="entr" presetSubtype="16" fill="hold" grpId="0" nodeType="clickEffect">
+                                  <p:stCondLst>
+                                    <p:cond delay="0"/>
+                                  </p:stCondLst>
+                                  <p:childTnLst>
+                                    <p:set>
+                                      <p:cBhvr>
+                                        <p:cTn id="6" dur="1" fill="hold">
+                                          <p:stCondLst>
+                                            <p:cond delay="0"/>
+                                          </p:stCondLst>
+                                        </p:cTn>
+                                        <p:tgtEl>
+                                          <p:spTgt spid="4"/>
+                                        </p:tgtEl>
+                                        <p:attrNameLst>
+                                          <p:attrName>style.visibility</p:attrName>
+                                        </p:attrNameLst>
+                                      </p:cBhvr>
+                                      <p:to>
+                                        <p:strVal val="visible"/>
+                                      </p:to>
+                                    </p:set>
+                                    <p:anim calcmode="lin" valueType="num">
+                                      <p:cBhvr>
+                                        <p:cTn id="7" dur="500" fill="hold"/>
+                                        <p:tgtEl>
+                                          <p:spTgt spid="4"/>
+                                        </p:tgtEl>
+                                        <p:attrNameLst>
+                                          <p:attrName>ppt_w</p:attrName>
+                                        </p:attrNameLst>
+                                      </p:cBhvr>
+                                      <p:tavLst>
+                                        <p:tav tm="0">
+                                          <p:val>
+                                            <p:fltVal val="0"/>
+                                          </p:val>
+                                        </p:tav>
+                                        <p:tav tm="100000">
+                                          <p:val>
+                                            <p:strVal val="#ppt_w"/>
+                                          </p:val>
+                                        </p:tav>
+                                      </p:tavLst>
+                                    </p:anim>
+                                    <p:anim calcmode="lin" valueType="num">
+                                      <p:cBhvr>
+                                        <p:cTn id="8" dur="500" fill="hold"/>
+                                        <p:tgtEl>
+                                          <p:spTgt spid="4"/>
+                                        </p:tgtEl>
+                                        <p:attrNameLst>
+                                          <p:attrName>ppt_h</p:attrName>
+                                        </p:attrNameLst>
+                                      </p:cBhvr>
+                                      <p:tavLst>
+                                        <p:tav tm="0">
+                                          <p:val>
+                                            <p:fltVal val="0"/>
+                                          </p:val>
+                                        </p:tav>
+                                        <p:tav tm="100000">
+                                          <p:val>
+                                            <p:strVal val="#ppt_h"/>
+                                          </p:val>
+                                        </p:tav>
+                                      </p:tavLst>
+                                    </p:anim>
+                                    <p:animEffect transition="in" filter="fade">
+                                      <p:cBhvr>
+                                        <p:cTn id="9" dur="500"/>
+                                        <p:tgtEl>
+                                          <p:spTgt spid="4"/>
+                                        </p:tgtEl>
+                                      </p:cBhvr>
+                                    </p:animEffect>
+                                  </p:childTnLst>
+                                </p:cTn>
+                              </p:par>
+                            </p:childTnLst>
+                          </p:cTn>
+                        </p:par>
+                      </p:childTnLst>
+                    </p:cTn>
+                  </p:par>
+                  <p:par>
+                    <p:cTn id="10" fill="hold">
+                      <p:stCondLst>
+                        <p:cond delay="indefinite"/>
+                      </p:stCondLst>
+                      <p:childTnLst>
+                        <p:par>
+                          <p:cTn id="11" fill="hold">
+                            <p:stCondLst>
+                              <p:cond delay="0"/>
+                            </p:stCondLst>
+                            <p:childTnLst>
+                              <p:par>
+                                <p:cTn id="12" presetID="42" presetClass="entr" presetSubtype="0" fill="hold" grpId="0" nodeType="clickEffect" nodePh="1">
+                                  <p:stCondLst>
+                                    <p:cond delay="0"/>
+                                  </p:stCondLst>
+                                  <p:endCondLst>
+                                    <p:cond evt="begin" delay="0">
+                                      <p:tn val="12"/>
+                                    </p:cond>
+                                  </p:endCondLst>
+                                  <p:childTnLst>
+                                    <p:set>
+                                      <p:cBhvr>
+                                        <p:cTn id="13" dur="1" fill="hold">
+                                          <p:stCondLst>
+                                            <p:cond delay="0"/>
+                                          </p:stCondLst>
+                                        </p:cTn>
+                                        <p:tgtEl>
+                                          <p:spTgt spid="8"/>
+                                        </p:tgtEl>
+                                        <p:attrNameLst>
+                                          <p:attrName>style.visibility</p:attrName>
+                                        </p:attrNameLst>
+                                      </p:cBhvr>
+                                      <p:to>
+                                        <p:strVal val="visible"/>
+                                      </p:to>
+                                    </p:set>
+                                    <p:animEffect transition="in" filter="fade">
+                                      <p:cBhvr>
+                                        <p:cTn id="14" dur="1000"/>
+                                        <p:tgtEl>
+                                          <p:spTgt spid="8"/>
+                                        </p:tgtEl>
+                                      </p:cBhvr>
+                                    </p:animEffect>
+                                    <p:anim calcmode="lin" valueType="num">
+                                      <p:cBhvr>
+                                        <p:cTn id="15" dur="1000" fill="hold"/>
+                                        <p:tgtEl>
+                                          <p:spTgt spid="8"/>
+                                        </p:tgtEl>
+                                        <p:attrNameLst>
+                                          <p:attrName>ppt_x</p:attrName>
+                                        </p:attrNameLst>
+                                      </p:cBhvr>
+                                      <p:tavLst>
+                                        <p:tav tm="0">
+                                          <p:val>
+                                            <p:strVal val="#ppt_x"/>
+                                          </p:val>
+                                        </p:tav>
+                                        <p:tav tm="100000">
+                                          <p:val>
+                                            <p:strVal val="#ppt_x"/>
+                                          </p:val>
+                                        </p:tav>
+                                      </p:tavLst>
+                                    </p:anim>
+                                    <p:anim calcmode="lin" valueType="num">
+                                      <p:cBhvr>
+                                        <p:cTn id="16" dur="1000" fill="hold"/>
+                                        <p:tgtEl>
+                                          <p:spTgt spid="8"/>
+                                        </p:tgtEl>
+                                        <p:attrNameLst>
+                                          <p:attrName>ppt_y</p:attrName>
+                                        </p:attrNameLst>
+                                      </p:cBhvr>
+                                      <p:tavLst>
+                                        <p:tav tm="0">
+                                          <p:val>
+                                            <p:strVal val="#ppt_y+.1"/>
+                                          </p:val>
+                                        </p:tav>
+                                        <p:tav tm="100000">
+                                          <p:val>
+                                            <p:strVal val="#ppt_y"/>
+                                          </p:val>
+                                        </p:tav>
+                                      </p:tavLst>
+                                    </p:anim>
+                                  </p:childTnLst>
+                                </p:cTn>
+                              </p:par>
+                            </p:childTnLst>
+                          </p:cTn>
+                        </p:par>
+                      </p:childTnLst>
+                    </p:cTn>
+                  </p:par>
+                </p:childTnLst>
+              </p:cTn>
+              <p:prevCondLst>
+                <p:cond evt="onPrev" delay="0">
+                  <p:tgtEl>
+                    <p:sldTgt/>
+                  </p:tgtEl>
+                </p:cond>
+              </p:prevCondLst>
+              <p:nextCondLst>
+                <p:cond evt="onNext" delay="0">
+                  <p:tgtEl>
+                    <p:sldTgt/>
+                  </p:tgtEl>
+                </p:cond>
+              </p:nextCondLst>
+            </p:seq>
+          </p:childTnLst>
+        </p:cTn>
+      </p:par>
+    </p:tnLst>
+    <p:bldLst>
+      <p:bldP spid="4" grpId="0"/>
+      <p:bldP spid="8" grpId="0"/>
+    </p:bldLst>
+  </p:timing>
+</p:sld>
+</file>
+
+<file path=ppt/slides/slide11.xml><?xml version="1.0" encoding="utf-8"?>
+<p:sld xmlns:a="http://schemas.openxmlformats.org/drawingml/2006/main" xmlns:r="http://schemas.openxmlformats.org/officeDocument/2006/relationships" xmlns:p="http://schemas.openxmlformats.org/presentationml/2006/main">
+  <p:cSld>
+    <p:spTree>
+      <p:nvGrpSpPr>
+        <p:cNvPr id="1" name="">
+          <a:extLst>
+            <a:ext uri="{FF2B5EF4-FFF2-40B4-BE49-F238E27FC236}">
               <a16:creationId xmlns:a16="http://schemas.microsoft.com/office/drawing/2014/main" id="{16F9E943-C59C-1D86-29CA-F786C47BABA8}"/>
             </a:ext>
           </a:extLst>
@@ -12213,7 +13048,7 @@
 </p:sld>
 </file>
 
-<file path=ppt/slides/slide11.xml><?xml version="1.0" encoding="utf-8"?>
+<file path=ppt/slides/slide12.xml><?xml version="1.0" encoding="utf-8"?>
 <p:sld xmlns:a="http://schemas.openxmlformats.org/drawingml/2006/main" xmlns:r="http://schemas.openxmlformats.org/officeDocument/2006/relationships" xmlns:p="http://schemas.openxmlformats.org/presentationml/2006/main">
   <p:cSld>
     <p:spTree>
@@ -13300,7 +14135,7 @@
 </p:sld>
 </file>
 
-<file path=ppt/slides/slide12.xml><?xml version="1.0" encoding="utf-8"?>
+<file path=ppt/slides/slide13.xml><?xml version="1.0" encoding="utf-8"?>
 <p:sld xmlns:a="http://schemas.openxmlformats.org/drawingml/2006/main" xmlns:r="http://schemas.openxmlformats.org/officeDocument/2006/relationships" xmlns:p="http://schemas.openxmlformats.org/presentationml/2006/main">
   <p:cSld>
     <p:spTree>
@@ -14387,7 +15222,7 @@
 </p:sld>
 </file>
 
-<file path=ppt/slides/slide13.xml><?xml version="1.0" encoding="utf-8"?>
+<file path=ppt/slides/slide14.xml><?xml version="1.0" encoding="utf-8"?>
 <p:sld xmlns:a="http://schemas.openxmlformats.org/drawingml/2006/main" xmlns:r="http://schemas.openxmlformats.org/officeDocument/2006/relationships" xmlns:p="http://schemas.openxmlformats.org/presentationml/2006/main">
   <p:cSld>
     <p:spTree>
@@ -15423,7 +16258,7 @@
 </p:sld>
 </file>
 
-<file path=ppt/slides/slide14.xml><?xml version="1.0" encoding="utf-8"?>
+<file path=ppt/slides/slide15.xml><?xml version="1.0" encoding="utf-8"?>
 <p:sld xmlns:a="http://schemas.openxmlformats.org/drawingml/2006/main" xmlns:r="http://schemas.openxmlformats.org/officeDocument/2006/relationships" xmlns:p="http://schemas.openxmlformats.org/presentationml/2006/main">
   <p:cSld>
     <p:spTree>
@@ -16474,7 +17309,7 @@
 </p:sld>
 </file>
 
-<file path=ppt/slides/slide15.xml><?xml version="1.0" encoding="utf-8"?>
+<file path=ppt/slides/slide16.xml><?xml version="1.0" encoding="utf-8"?>
 <p:sld xmlns:a="http://schemas.openxmlformats.org/drawingml/2006/main" xmlns:r="http://schemas.openxmlformats.org/officeDocument/2006/relationships" xmlns:p="http://schemas.openxmlformats.org/presentationml/2006/main">
   <p:cSld>
     <p:spTree>
@@ -17528,7 +18363,7 @@
 </p:sld>
 </file>
 
-<file path=ppt/slides/slide16.xml><?xml version="1.0" encoding="utf-8"?>
+<file path=ppt/slides/slide17.xml><?xml version="1.0" encoding="utf-8"?>
 <p:sld xmlns:a="http://schemas.openxmlformats.org/drawingml/2006/main" xmlns:r="http://schemas.openxmlformats.org/officeDocument/2006/relationships" xmlns:p="http://schemas.openxmlformats.org/presentationml/2006/main">
   <p:cSld>
     <p:spTree>
@@ -18517,7 +19352,7 @@
 </p:sld>
 </file>
 
-<file path=ppt/slides/slide17.xml><?xml version="1.0" encoding="utf-8"?>
+<file path=ppt/slides/slide18.xml><?xml version="1.0" encoding="utf-8"?>
 <p:sld xmlns:a="http://schemas.openxmlformats.org/drawingml/2006/main" xmlns:r="http://schemas.openxmlformats.org/officeDocument/2006/relationships" xmlns:p="http://schemas.openxmlformats.org/presentationml/2006/main">
   <p:cSld>
     <p:spTree>
@@ -19508,7 +20343,7 @@
 </p:sld>
 </file>
 
-<file path=ppt/slides/slide18.xml><?xml version="1.0" encoding="utf-8"?>
+<file path=ppt/slides/slide19.xml><?xml version="1.0" encoding="utf-8"?>
 <p:sld xmlns:a="http://schemas.openxmlformats.org/drawingml/2006/main" xmlns:r="http://schemas.openxmlformats.org/officeDocument/2006/relationships" xmlns:p="http://schemas.openxmlformats.org/presentationml/2006/main">
   <p:cSld>
     <p:spTree>
@@ -25672,8 +26507,8 @@
         </p:nvSpPr>
         <p:spPr>
           <a:xfrm>
-            <a:off x="1865843" y="1278384"/>
-            <a:ext cx="8341847" cy="5428169"/>
+            <a:off x="1865844" y="1278384"/>
+            <a:ext cx="6018524" cy="5428169"/>
           </a:xfrm>
         </p:spPr>
         <p:txBody>
@@ -25737,64 +26572,6 @@
             <a:r>
               <a:rPr lang="en-IN" dirty="0"/>
               <a:t>Effect Size Analysis</a:t>
-            </a:r>
-          </a:p>
-          <a:p>
-            <a:pPr marL="0" lvl="0" indent="0">
-              <a:buNone/>
-            </a:pPr>
-            <a:endParaRPr lang="en-IN" b="1" dirty="0"/>
-          </a:p>
-          <a:p>
-            <a:pPr marL="0" lvl="0" indent="0">
-              <a:buNone/>
-            </a:pPr>
-            <a:endParaRPr lang="en-IN" b="1" dirty="0"/>
-          </a:p>
-          <a:p>
-            <a:pPr marL="0" lvl="0" indent="0">
-              <a:buNone/>
-            </a:pPr>
-            <a:r>
-              <a:rPr lang="en-IN" b="1" dirty="0"/>
-              <a:t>Data Processing</a:t>
-            </a:r>
-          </a:p>
-          <a:p>
-            <a:pPr lvl="0"/>
-            <a:r>
-              <a:rPr lang="en-IN" dirty="0"/>
-              <a:t>Data Cleaning and Preprocessing</a:t>
-            </a:r>
-          </a:p>
-          <a:p>
-            <a:pPr lvl="0"/>
-            <a:r>
-              <a:rPr lang="en-IN" dirty="0"/>
-              <a:t>Feature Engineering</a:t>
-            </a:r>
-          </a:p>
-          <a:p>
-            <a:pPr lvl="0"/>
-            <a:r>
-              <a:rPr lang="en-IN" dirty="0"/>
-              <a:t>Outlier Detection using IQR and Modified Z-Score</a:t>
-            </a:r>
-          </a:p>
-          <a:p>
-            <a:pPr marL="0" indent="0">
-              <a:buNone/>
-            </a:pPr>
-            <a:r>
-              <a:rPr lang="en-IN" b="1" dirty="0"/>
-              <a:t>Dataset</a:t>
-            </a:r>
-          </a:p>
-          <a:p>
-            <a:pPr lvl="0"/>
-            <a:r>
-              <a:rPr lang="en-IN" dirty="0"/>
-              <a:t>Seasonal agricultural data containing crop, environmental, resource, production, and economic attributes.</a:t>
             </a:r>
           </a:p>
         </p:txBody>
@@ -26842,696 +27619,6 @@
                                           <p:spTgt spid="7">
                                             <p:txEl>
                                               <p:pRg st="7" end="7"/>
-                                            </p:txEl>
-                                          </p:spTgt>
-                                        </p:tgtEl>
-                                        <p:attrNameLst>
-                                          <p:attrName>ppt_y</p:attrName>
-                                        </p:attrNameLst>
-                                      </p:cBhvr>
-                                      <p:tavLst>
-                                        <p:tav tm="0">
-                                          <p:val>
-                                            <p:strVal val="#ppt_y+.1"/>
-                                          </p:val>
-                                        </p:tav>
-                                        <p:tav tm="100000">
-                                          <p:val>
-                                            <p:strVal val="#ppt_y"/>
-                                          </p:val>
-                                        </p:tav>
-                                      </p:tavLst>
-                                    </p:anim>
-                                  </p:childTnLst>
-                                </p:cTn>
-                              </p:par>
-                            </p:childTnLst>
-                          </p:cTn>
-                        </p:par>
-                      </p:childTnLst>
-                    </p:cTn>
-                  </p:par>
-                  <p:par>
-                    <p:cTn id="66" fill="hold">
-                      <p:stCondLst>
-                        <p:cond delay="indefinite"/>
-                      </p:stCondLst>
-                      <p:childTnLst>
-                        <p:par>
-                          <p:cTn id="67" fill="hold">
-                            <p:stCondLst>
-                              <p:cond delay="0"/>
-                            </p:stCondLst>
-                            <p:childTnLst>
-                              <p:par>
-                                <p:cTn id="68" presetID="42" presetClass="entr" presetSubtype="0" fill="hold" grpId="0" nodeType="clickEffect">
-                                  <p:stCondLst>
-                                    <p:cond delay="0"/>
-                                  </p:stCondLst>
-                                  <p:childTnLst>
-                                    <p:set>
-                                      <p:cBhvr>
-                                        <p:cTn id="69" dur="1" fill="hold">
-                                          <p:stCondLst>
-                                            <p:cond delay="0"/>
-                                          </p:stCondLst>
-                                        </p:cTn>
-                                        <p:tgtEl>
-                                          <p:spTgt spid="7">
-                                            <p:txEl>
-                                              <p:pRg st="10" end="10"/>
-                                            </p:txEl>
-                                          </p:spTgt>
-                                        </p:tgtEl>
-                                        <p:attrNameLst>
-                                          <p:attrName>style.visibility</p:attrName>
-                                        </p:attrNameLst>
-                                      </p:cBhvr>
-                                      <p:to>
-                                        <p:strVal val="visible"/>
-                                      </p:to>
-                                    </p:set>
-                                    <p:animEffect transition="in" filter="fade">
-                                      <p:cBhvr>
-                                        <p:cTn id="70" dur="1000"/>
-                                        <p:tgtEl>
-                                          <p:spTgt spid="7">
-                                            <p:txEl>
-                                              <p:pRg st="10" end="10"/>
-                                            </p:txEl>
-                                          </p:spTgt>
-                                        </p:tgtEl>
-                                      </p:cBhvr>
-                                    </p:animEffect>
-                                    <p:anim calcmode="lin" valueType="num">
-                                      <p:cBhvr>
-                                        <p:cTn id="71" dur="1000" fill="hold"/>
-                                        <p:tgtEl>
-                                          <p:spTgt spid="7">
-                                            <p:txEl>
-                                              <p:pRg st="10" end="10"/>
-                                            </p:txEl>
-                                          </p:spTgt>
-                                        </p:tgtEl>
-                                        <p:attrNameLst>
-                                          <p:attrName>ppt_x</p:attrName>
-                                        </p:attrNameLst>
-                                      </p:cBhvr>
-                                      <p:tavLst>
-                                        <p:tav tm="0">
-                                          <p:val>
-                                            <p:strVal val="#ppt_x"/>
-                                          </p:val>
-                                        </p:tav>
-                                        <p:tav tm="100000">
-                                          <p:val>
-                                            <p:strVal val="#ppt_x"/>
-                                          </p:val>
-                                        </p:tav>
-                                      </p:tavLst>
-                                    </p:anim>
-                                    <p:anim calcmode="lin" valueType="num">
-                                      <p:cBhvr>
-                                        <p:cTn id="72" dur="1000" fill="hold"/>
-                                        <p:tgtEl>
-                                          <p:spTgt spid="7">
-                                            <p:txEl>
-                                              <p:pRg st="10" end="10"/>
-                                            </p:txEl>
-                                          </p:spTgt>
-                                        </p:tgtEl>
-                                        <p:attrNameLst>
-                                          <p:attrName>ppt_y</p:attrName>
-                                        </p:attrNameLst>
-                                      </p:cBhvr>
-                                      <p:tavLst>
-                                        <p:tav tm="0">
-                                          <p:val>
-                                            <p:strVal val="#ppt_y+.1"/>
-                                          </p:val>
-                                        </p:tav>
-                                        <p:tav tm="100000">
-                                          <p:val>
-                                            <p:strVal val="#ppt_y"/>
-                                          </p:val>
-                                        </p:tav>
-                                      </p:tavLst>
-                                    </p:anim>
-                                  </p:childTnLst>
-                                </p:cTn>
-                              </p:par>
-                            </p:childTnLst>
-                          </p:cTn>
-                        </p:par>
-                      </p:childTnLst>
-                    </p:cTn>
-                  </p:par>
-                  <p:par>
-                    <p:cTn id="73" fill="hold">
-                      <p:stCondLst>
-                        <p:cond delay="indefinite"/>
-                      </p:stCondLst>
-                      <p:childTnLst>
-                        <p:par>
-                          <p:cTn id="74" fill="hold">
-                            <p:stCondLst>
-                              <p:cond delay="0"/>
-                            </p:stCondLst>
-                            <p:childTnLst>
-                              <p:par>
-                                <p:cTn id="75" presetID="42" presetClass="entr" presetSubtype="0" fill="hold" grpId="0" nodeType="clickEffect">
-                                  <p:stCondLst>
-                                    <p:cond delay="0"/>
-                                  </p:stCondLst>
-                                  <p:childTnLst>
-                                    <p:set>
-                                      <p:cBhvr>
-                                        <p:cTn id="76" dur="1" fill="hold">
-                                          <p:stCondLst>
-                                            <p:cond delay="0"/>
-                                          </p:stCondLst>
-                                        </p:cTn>
-                                        <p:tgtEl>
-                                          <p:spTgt spid="7">
-                                            <p:txEl>
-                                              <p:pRg st="11" end="11"/>
-                                            </p:txEl>
-                                          </p:spTgt>
-                                        </p:tgtEl>
-                                        <p:attrNameLst>
-                                          <p:attrName>style.visibility</p:attrName>
-                                        </p:attrNameLst>
-                                      </p:cBhvr>
-                                      <p:to>
-                                        <p:strVal val="visible"/>
-                                      </p:to>
-                                    </p:set>
-                                    <p:animEffect transition="in" filter="fade">
-                                      <p:cBhvr>
-                                        <p:cTn id="77" dur="1000"/>
-                                        <p:tgtEl>
-                                          <p:spTgt spid="7">
-                                            <p:txEl>
-                                              <p:pRg st="11" end="11"/>
-                                            </p:txEl>
-                                          </p:spTgt>
-                                        </p:tgtEl>
-                                      </p:cBhvr>
-                                    </p:animEffect>
-                                    <p:anim calcmode="lin" valueType="num">
-                                      <p:cBhvr>
-                                        <p:cTn id="78" dur="1000" fill="hold"/>
-                                        <p:tgtEl>
-                                          <p:spTgt spid="7">
-                                            <p:txEl>
-                                              <p:pRg st="11" end="11"/>
-                                            </p:txEl>
-                                          </p:spTgt>
-                                        </p:tgtEl>
-                                        <p:attrNameLst>
-                                          <p:attrName>ppt_x</p:attrName>
-                                        </p:attrNameLst>
-                                      </p:cBhvr>
-                                      <p:tavLst>
-                                        <p:tav tm="0">
-                                          <p:val>
-                                            <p:strVal val="#ppt_x"/>
-                                          </p:val>
-                                        </p:tav>
-                                        <p:tav tm="100000">
-                                          <p:val>
-                                            <p:strVal val="#ppt_x"/>
-                                          </p:val>
-                                        </p:tav>
-                                      </p:tavLst>
-                                    </p:anim>
-                                    <p:anim calcmode="lin" valueType="num">
-                                      <p:cBhvr>
-                                        <p:cTn id="79" dur="1000" fill="hold"/>
-                                        <p:tgtEl>
-                                          <p:spTgt spid="7">
-                                            <p:txEl>
-                                              <p:pRg st="11" end="11"/>
-                                            </p:txEl>
-                                          </p:spTgt>
-                                        </p:tgtEl>
-                                        <p:attrNameLst>
-                                          <p:attrName>ppt_y</p:attrName>
-                                        </p:attrNameLst>
-                                      </p:cBhvr>
-                                      <p:tavLst>
-                                        <p:tav tm="0">
-                                          <p:val>
-                                            <p:strVal val="#ppt_y+.1"/>
-                                          </p:val>
-                                        </p:tav>
-                                        <p:tav tm="100000">
-                                          <p:val>
-                                            <p:strVal val="#ppt_y"/>
-                                          </p:val>
-                                        </p:tav>
-                                      </p:tavLst>
-                                    </p:anim>
-                                  </p:childTnLst>
-                                </p:cTn>
-                              </p:par>
-                            </p:childTnLst>
-                          </p:cTn>
-                        </p:par>
-                      </p:childTnLst>
-                    </p:cTn>
-                  </p:par>
-                  <p:par>
-                    <p:cTn id="80" fill="hold">
-                      <p:stCondLst>
-                        <p:cond delay="indefinite"/>
-                      </p:stCondLst>
-                      <p:childTnLst>
-                        <p:par>
-                          <p:cTn id="81" fill="hold">
-                            <p:stCondLst>
-                              <p:cond delay="0"/>
-                            </p:stCondLst>
-                            <p:childTnLst>
-                              <p:par>
-                                <p:cTn id="82" presetID="42" presetClass="entr" presetSubtype="0" fill="hold" grpId="0" nodeType="clickEffect">
-                                  <p:stCondLst>
-                                    <p:cond delay="0"/>
-                                  </p:stCondLst>
-                                  <p:childTnLst>
-                                    <p:set>
-                                      <p:cBhvr>
-                                        <p:cTn id="83" dur="1" fill="hold">
-                                          <p:stCondLst>
-                                            <p:cond delay="0"/>
-                                          </p:stCondLst>
-                                        </p:cTn>
-                                        <p:tgtEl>
-                                          <p:spTgt spid="7">
-                                            <p:txEl>
-                                              <p:pRg st="12" end="12"/>
-                                            </p:txEl>
-                                          </p:spTgt>
-                                        </p:tgtEl>
-                                        <p:attrNameLst>
-                                          <p:attrName>style.visibility</p:attrName>
-                                        </p:attrNameLst>
-                                      </p:cBhvr>
-                                      <p:to>
-                                        <p:strVal val="visible"/>
-                                      </p:to>
-                                    </p:set>
-                                    <p:animEffect transition="in" filter="fade">
-                                      <p:cBhvr>
-                                        <p:cTn id="84" dur="1000"/>
-                                        <p:tgtEl>
-                                          <p:spTgt spid="7">
-                                            <p:txEl>
-                                              <p:pRg st="12" end="12"/>
-                                            </p:txEl>
-                                          </p:spTgt>
-                                        </p:tgtEl>
-                                      </p:cBhvr>
-                                    </p:animEffect>
-                                    <p:anim calcmode="lin" valueType="num">
-                                      <p:cBhvr>
-                                        <p:cTn id="85" dur="1000" fill="hold"/>
-                                        <p:tgtEl>
-                                          <p:spTgt spid="7">
-                                            <p:txEl>
-                                              <p:pRg st="12" end="12"/>
-                                            </p:txEl>
-                                          </p:spTgt>
-                                        </p:tgtEl>
-                                        <p:attrNameLst>
-                                          <p:attrName>ppt_x</p:attrName>
-                                        </p:attrNameLst>
-                                      </p:cBhvr>
-                                      <p:tavLst>
-                                        <p:tav tm="0">
-                                          <p:val>
-                                            <p:strVal val="#ppt_x"/>
-                                          </p:val>
-                                        </p:tav>
-                                        <p:tav tm="100000">
-                                          <p:val>
-                                            <p:strVal val="#ppt_x"/>
-                                          </p:val>
-                                        </p:tav>
-                                      </p:tavLst>
-                                    </p:anim>
-                                    <p:anim calcmode="lin" valueType="num">
-                                      <p:cBhvr>
-                                        <p:cTn id="86" dur="1000" fill="hold"/>
-                                        <p:tgtEl>
-                                          <p:spTgt spid="7">
-                                            <p:txEl>
-                                              <p:pRg st="12" end="12"/>
-                                            </p:txEl>
-                                          </p:spTgt>
-                                        </p:tgtEl>
-                                        <p:attrNameLst>
-                                          <p:attrName>ppt_y</p:attrName>
-                                        </p:attrNameLst>
-                                      </p:cBhvr>
-                                      <p:tavLst>
-                                        <p:tav tm="0">
-                                          <p:val>
-                                            <p:strVal val="#ppt_y+.1"/>
-                                          </p:val>
-                                        </p:tav>
-                                        <p:tav tm="100000">
-                                          <p:val>
-                                            <p:strVal val="#ppt_y"/>
-                                          </p:val>
-                                        </p:tav>
-                                      </p:tavLst>
-                                    </p:anim>
-                                  </p:childTnLst>
-                                </p:cTn>
-                              </p:par>
-                            </p:childTnLst>
-                          </p:cTn>
-                        </p:par>
-                      </p:childTnLst>
-                    </p:cTn>
-                  </p:par>
-                  <p:par>
-                    <p:cTn id="87" fill="hold">
-                      <p:stCondLst>
-                        <p:cond delay="indefinite"/>
-                      </p:stCondLst>
-                      <p:childTnLst>
-                        <p:par>
-                          <p:cTn id="88" fill="hold">
-                            <p:stCondLst>
-                              <p:cond delay="0"/>
-                            </p:stCondLst>
-                            <p:childTnLst>
-                              <p:par>
-                                <p:cTn id="89" presetID="42" presetClass="entr" presetSubtype="0" fill="hold" grpId="0" nodeType="clickEffect">
-                                  <p:stCondLst>
-                                    <p:cond delay="0"/>
-                                  </p:stCondLst>
-                                  <p:childTnLst>
-                                    <p:set>
-                                      <p:cBhvr>
-                                        <p:cTn id="90" dur="1" fill="hold">
-                                          <p:stCondLst>
-                                            <p:cond delay="0"/>
-                                          </p:stCondLst>
-                                        </p:cTn>
-                                        <p:tgtEl>
-                                          <p:spTgt spid="7">
-                                            <p:txEl>
-                                              <p:pRg st="13" end="13"/>
-                                            </p:txEl>
-                                          </p:spTgt>
-                                        </p:tgtEl>
-                                        <p:attrNameLst>
-                                          <p:attrName>style.visibility</p:attrName>
-                                        </p:attrNameLst>
-                                      </p:cBhvr>
-                                      <p:to>
-                                        <p:strVal val="visible"/>
-                                      </p:to>
-                                    </p:set>
-                                    <p:animEffect transition="in" filter="fade">
-                                      <p:cBhvr>
-                                        <p:cTn id="91" dur="1000"/>
-                                        <p:tgtEl>
-                                          <p:spTgt spid="7">
-                                            <p:txEl>
-                                              <p:pRg st="13" end="13"/>
-                                            </p:txEl>
-                                          </p:spTgt>
-                                        </p:tgtEl>
-                                      </p:cBhvr>
-                                    </p:animEffect>
-                                    <p:anim calcmode="lin" valueType="num">
-                                      <p:cBhvr>
-                                        <p:cTn id="92" dur="1000" fill="hold"/>
-                                        <p:tgtEl>
-                                          <p:spTgt spid="7">
-                                            <p:txEl>
-                                              <p:pRg st="13" end="13"/>
-                                            </p:txEl>
-                                          </p:spTgt>
-                                        </p:tgtEl>
-                                        <p:attrNameLst>
-                                          <p:attrName>ppt_x</p:attrName>
-                                        </p:attrNameLst>
-                                      </p:cBhvr>
-                                      <p:tavLst>
-                                        <p:tav tm="0">
-                                          <p:val>
-                                            <p:strVal val="#ppt_x"/>
-                                          </p:val>
-                                        </p:tav>
-                                        <p:tav tm="100000">
-                                          <p:val>
-                                            <p:strVal val="#ppt_x"/>
-                                          </p:val>
-                                        </p:tav>
-                                      </p:tavLst>
-                                    </p:anim>
-                                    <p:anim calcmode="lin" valueType="num">
-                                      <p:cBhvr>
-                                        <p:cTn id="93" dur="1000" fill="hold"/>
-                                        <p:tgtEl>
-                                          <p:spTgt spid="7">
-                                            <p:txEl>
-                                              <p:pRg st="13" end="13"/>
-                                            </p:txEl>
-                                          </p:spTgt>
-                                        </p:tgtEl>
-                                        <p:attrNameLst>
-                                          <p:attrName>ppt_y</p:attrName>
-                                        </p:attrNameLst>
-                                      </p:cBhvr>
-                                      <p:tavLst>
-                                        <p:tav tm="0">
-                                          <p:val>
-                                            <p:strVal val="#ppt_y+.1"/>
-                                          </p:val>
-                                        </p:tav>
-                                        <p:tav tm="100000">
-                                          <p:val>
-                                            <p:strVal val="#ppt_y"/>
-                                          </p:val>
-                                        </p:tav>
-                                      </p:tavLst>
-                                    </p:anim>
-                                  </p:childTnLst>
-                                </p:cTn>
-                              </p:par>
-                            </p:childTnLst>
-                          </p:cTn>
-                        </p:par>
-                      </p:childTnLst>
-                    </p:cTn>
-                  </p:par>
-                  <p:par>
-                    <p:cTn id="94" fill="hold">
-                      <p:stCondLst>
-                        <p:cond delay="indefinite"/>
-                      </p:stCondLst>
-                      <p:childTnLst>
-                        <p:par>
-                          <p:cTn id="95" fill="hold">
-                            <p:stCondLst>
-                              <p:cond delay="0"/>
-                            </p:stCondLst>
-                            <p:childTnLst>
-                              <p:par>
-                                <p:cTn id="96" presetID="42" presetClass="entr" presetSubtype="0" fill="hold" grpId="0" nodeType="clickEffect">
-                                  <p:stCondLst>
-                                    <p:cond delay="0"/>
-                                  </p:stCondLst>
-                                  <p:childTnLst>
-                                    <p:set>
-                                      <p:cBhvr>
-                                        <p:cTn id="97" dur="1" fill="hold">
-                                          <p:stCondLst>
-                                            <p:cond delay="0"/>
-                                          </p:stCondLst>
-                                        </p:cTn>
-                                        <p:tgtEl>
-                                          <p:spTgt spid="7">
-                                            <p:txEl>
-                                              <p:pRg st="14" end="14"/>
-                                            </p:txEl>
-                                          </p:spTgt>
-                                        </p:tgtEl>
-                                        <p:attrNameLst>
-                                          <p:attrName>style.visibility</p:attrName>
-                                        </p:attrNameLst>
-                                      </p:cBhvr>
-                                      <p:to>
-                                        <p:strVal val="visible"/>
-                                      </p:to>
-                                    </p:set>
-                                    <p:animEffect transition="in" filter="fade">
-                                      <p:cBhvr>
-                                        <p:cTn id="98" dur="1000"/>
-                                        <p:tgtEl>
-                                          <p:spTgt spid="7">
-                                            <p:txEl>
-                                              <p:pRg st="14" end="14"/>
-                                            </p:txEl>
-                                          </p:spTgt>
-                                        </p:tgtEl>
-                                      </p:cBhvr>
-                                    </p:animEffect>
-                                    <p:anim calcmode="lin" valueType="num">
-                                      <p:cBhvr>
-                                        <p:cTn id="99" dur="1000" fill="hold"/>
-                                        <p:tgtEl>
-                                          <p:spTgt spid="7">
-                                            <p:txEl>
-                                              <p:pRg st="14" end="14"/>
-                                            </p:txEl>
-                                          </p:spTgt>
-                                        </p:tgtEl>
-                                        <p:attrNameLst>
-                                          <p:attrName>ppt_x</p:attrName>
-                                        </p:attrNameLst>
-                                      </p:cBhvr>
-                                      <p:tavLst>
-                                        <p:tav tm="0">
-                                          <p:val>
-                                            <p:strVal val="#ppt_x"/>
-                                          </p:val>
-                                        </p:tav>
-                                        <p:tav tm="100000">
-                                          <p:val>
-                                            <p:strVal val="#ppt_x"/>
-                                          </p:val>
-                                        </p:tav>
-                                      </p:tavLst>
-                                    </p:anim>
-                                    <p:anim calcmode="lin" valueType="num">
-                                      <p:cBhvr>
-                                        <p:cTn id="100" dur="1000" fill="hold"/>
-                                        <p:tgtEl>
-                                          <p:spTgt spid="7">
-                                            <p:txEl>
-                                              <p:pRg st="14" end="14"/>
-                                            </p:txEl>
-                                          </p:spTgt>
-                                        </p:tgtEl>
-                                        <p:attrNameLst>
-                                          <p:attrName>ppt_y</p:attrName>
-                                        </p:attrNameLst>
-                                      </p:cBhvr>
-                                      <p:tavLst>
-                                        <p:tav tm="0">
-                                          <p:val>
-                                            <p:strVal val="#ppt_y+.1"/>
-                                          </p:val>
-                                        </p:tav>
-                                        <p:tav tm="100000">
-                                          <p:val>
-                                            <p:strVal val="#ppt_y"/>
-                                          </p:val>
-                                        </p:tav>
-                                      </p:tavLst>
-                                    </p:anim>
-                                  </p:childTnLst>
-                                </p:cTn>
-                              </p:par>
-                            </p:childTnLst>
-                          </p:cTn>
-                        </p:par>
-                      </p:childTnLst>
-                    </p:cTn>
-                  </p:par>
-                  <p:par>
-                    <p:cTn id="101" fill="hold">
-                      <p:stCondLst>
-                        <p:cond delay="indefinite"/>
-                      </p:stCondLst>
-                      <p:childTnLst>
-                        <p:par>
-                          <p:cTn id="102" fill="hold">
-                            <p:stCondLst>
-                              <p:cond delay="0"/>
-                            </p:stCondLst>
-                            <p:childTnLst>
-                              <p:par>
-                                <p:cTn id="103" presetID="42" presetClass="entr" presetSubtype="0" fill="hold" grpId="0" nodeType="clickEffect">
-                                  <p:stCondLst>
-                                    <p:cond delay="0"/>
-                                  </p:stCondLst>
-                                  <p:childTnLst>
-                                    <p:set>
-                                      <p:cBhvr>
-                                        <p:cTn id="104" dur="1" fill="hold">
-                                          <p:stCondLst>
-                                            <p:cond delay="0"/>
-                                          </p:stCondLst>
-                                        </p:cTn>
-                                        <p:tgtEl>
-                                          <p:spTgt spid="7">
-                                            <p:txEl>
-                                              <p:pRg st="15" end="15"/>
-                                            </p:txEl>
-                                          </p:spTgt>
-                                        </p:tgtEl>
-                                        <p:attrNameLst>
-                                          <p:attrName>style.visibility</p:attrName>
-                                        </p:attrNameLst>
-                                      </p:cBhvr>
-                                      <p:to>
-                                        <p:strVal val="visible"/>
-                                      </p:to>
-                                    </p:set>
-                                    <p:animEffect transition="in" filter="fade">
-                                      <p:cBhvr>
-                                        <p:cTn id="105" dur="1000"/>
-                                        <p:tgtEl>
-                                          <p:spTgt spid="7">
-                                            <p:txEl>
-                                              <p:pRg st="15" end="15"/>
-                                            </p:txEl>
-                                          </p:spTgt>
-                                        </p:tgtEl>
-                                      </p:cBhvr>
-                                    </p:animEffect>
-                                    <p:anim calcmode="lin" valueType="num">
-                                      <p:cBhvr>
-                                        <p:cTn id="106" dur="1000" fill="hold"/>
-                                        <p:tgtEl>
-                                          <p:spTgt spid="7">
-                                            <p:txEl>
-                                              <p:pRg st="15" end="15"/>
-                                            </p:txEl>
-                                          </p:spTgt>
-                                        </p:tgtEl>
-                                        <p:attrNameLst>
-                                          <p:attrName>ppt_x</p:attrName>
-                                        </p:attrNameLst>
-                                      </p:cBhvr>
-                                      <p:tavLst>
-                                        <p:tav tm="0">
-                                          <p:val>
-                                            <p:strVal val="#ppt_x"/>
-                                          </p:val>
-                                        </p:tav>
-                                        <p:tav tm="100000">
-                                          <p:val>
-                                            <p:strVal val="#ppt_x"/>
-                                          </p:val>
-                                        </p:tav>
-                                      </p:tavLst>
-                                    </p:anim>
-                                    <p:anim calcmode="lin" valueType="num">
-                                      <p:cBhvr>
-                                        <p:cTn id="107" dur="1000" fill="hold"/>
-                                        <p:tgtEl>
-                                          <p:spTgt spid="7">
-                                            <p:txEl>
-                                              <p:pRg st="15" end="15"/>
                                             </p:txEl>
                                           </p:spTgt>
                                         </p:tgtEl>
@@ -27591,6 +27678,1045 @@
 </file>
 
 <file path=ppt/slides/slide8.xml><?xml version="1.0" encoding="utf-8"?>
+<p:sld xmlns:a="http://schemas.openxmlformats.org/drawingml/2006/main" xmlns:r="http://schemas.openxmlformats.org/officeDocument/2006/relationships" xmlns:p="http://schemas.openxmlformats.org/presentationml/2006/main">
+  <p:cSld>
+    <p:bg>
+      <p:bgPr>
+        <a:solidFill>
+          <a:schemeClr val="bg1">
+            <a:lumMod val="95000"/>
+          </a:schemeClr>
+        </a:solidFill>
+        <a:effectLst/>
+      </p:bgPr>
+    </p:bg>
+    <p:spTree>
+      <p:nvGrpSpPr>
+        <p:cNvPr id="1" name="">
+          <a:extLst>
+            <a:ext uri="{FF2B5EF4-FFF2-40B4-BE49-F238E27FC236}">
+              <a16:creationId xmlns:a16="http://schemas.microsoft.com/office/drawing/2014/main" id="{1C7F883C-18D9-C429-42FE-B753DF69FC53}"/>
+            </a:ext>
+          </a:extLst>
+        </p:cNvPr>
+        <p:cNvGrpSpPr/>
+        <p:nvPr/>
+      </p:nvGrpSpPr>
+      <p:grpSpPr>
+        <a:xfrm>
+          <a:off x="0" y="0"/>
+          <a:ext cx="0" cy="0"/>
+          <a:chOff x="0" y="0"/>
+          <a:chExt cx="0" cy="0"/>
+        </a:xfrm>
+      </p:grpSpPr>
+      <p:pic>
+        <p:nvPicPr>
+          <p:cNvPr id="6" name="Picture 5">
+            <a:extLst>
+              <a:ext uri="{FF2B5EF4-FFF2-40B4-BE49-F238E27FC236}">
+                <a16:creationId xmlns:a16="http://schemas.microsoft.com/office/drawing/2014/main" id="{7E2B63A9-2DF7-8161-7121-C5B56D125273}"/>
+              </a:ext>
+            </a:extLst>
+          </p:cNvPr>
+          <p:cNvPicPr>
+            <a:picLocks noChangeAspect="1"/>
+          </p:cNvPicPr>
+          <p:nvPr/>
+        </p:nvPicPr>
+        <p:blipFill>
+          <a:blip r:embed="rId3"/>
+          <a:stretch>
+            <a:fillRect/>
+          </a:stretch>
+        </p:blipFill>
+        <p:spPr>
+          <a:xfrm>
+            <a:off x="467359" y="6410461"/>
+            <a:ext cx="3706253" cy="296092"/>
+          </a:xfrm>
+          <a:prstGeom prst="rect">
+            <a:avLst/>
+          </a:prstGeom>
+        </p:spPr>
+      </p:pic>
+      <p:pic>
+        <p:nvPicPr>
+          <p:cNvPr id="2" name="Picture 1">
+            <a:extLst>
+              <a:ext uri="{FF2B5EF4-FFF2-40B4-BE49-F238E27FC236}">
+                <a16:creationId xmlns:a16="http://schemas.microsoft.com/office/drawing/2014/main" id="{BC4F1DFB-84E1-A9F9-8C1A-382375BC8F18}"/>
+              </a:ext>
+            </a:extLst>
+          </p:cNvPr>
+          <p:cNvPicPr>
+            <a:picLocks noChangeAspect="1"/>
+          </p:cNvPicPr>
+          <p:nvPr/>
+        </p:nvPicPr>
+        <p:blipFill>
+          <a:blip r:embed="rId4"/>
+          <a:stretch>
+            <a:fillRect/>
+          </a:stretch>
+        </p:blipFill>
+        <p:spPr>
+          <a:xfrm flipH="1">
+            <a:off x="50800" y="3820160"/>
+            <a:ext cx="1727200" cy="3010024"/>
+          </a:xfrm>
+          <a:prstGeom prst="rect">
+            <a:avLst/>
+          </a:prstGeom>
+        </p:spPr>
+      </p:pic>
+      <p:sp>
+        <p:nvSpPr>
+          <p:cNvPr id="7" name="Text Placeholder 6">
+            <a:extLst>
+              <a:ext uri="{FF2B5EF4-FFF2-40B4-BE49-F238E27FC236}">
+                <a16:creationId xmlns:a16="http://schemas.microsoft.com/office/drawing/2014/main" id="{DB2F90B0-C69F-1477-4978-62D9B22F4F95}"/>
+              </a:ext>
+            </a:extLst>
+          </p:cNvPr>
+          <p:cNvSpPr>
+            <a:spLocks noGrp="1"/>
+          </p:cNvSpPr>
+          <p:nvPr>
+            <p:ph type="body" sz="quarter" idx="12"/>
+          </p:nvPr>
+        </p:nvSpPr>
+        <p:spPr>
+          <a:xfrm>
+            <a:off x="1865843" y="1278384"/>
+            <a:ext cx="8341847" cy="5428169"/>
+          </a:xfrm>
+        </p:spPr>
+        <p:txBody>
+          <a:bodyPr numCol="2">
+            <a:noAutofit/>
+          </a:bodyPr>
+          <a:lstStyle/>
+          <a:p>
+            <a:pPr marL="0" lvl="0" indent="0">
+              <a:buNone/>
+            </a:pPr>
+            <a:r>
+              <a:rPr lang="en-IN" b="1" dirty="0"/>
+              <a:t>Data Processing</a:t>
+            </a:r>
+          </a:p>
+          <a:p>
+            <a:pPr lvl="0"/>
+            <a:r>
+              <a:rPr lang="en-IN" dirty="0"/>
+              <a:t>Data Cleaning and Preprocessing</a:t>
+            </a:r>
+          </a:p>
+          <a:p>
+            <a:pPr lvl="0"/>
+            <a:r>
+              <a:rPr lang="en-IN" dirty="0"/>
+              <a:t>Feature Engineering</a:t>
+            </a:r>
+          </a:p>
+          <a:p>
+            <a:pPr lvl="0"/>
+            <a:r>
+              <a:rPr lang="en-IN" dirty="0"/>
+              <a:t>Outlier Detection using IQR and Modified Z-Score</a:t>
+            </a:r>
+          </a:p>
+          <a:p>
+            <a:pPr marL="0" indent="0">
+              <a:buNone/>
+            </a:pPr>
+            <a:r>
+              <a:rPr lang="en-IN" b="1" dirty="0"/>
+              <a:t>Dataset</a:t>
+            </a:r>
+          </a:p>
+          <a:p>
+            <a:pPr lvl="0"/>
+            <a:r>
+              <a:rPr lang="en-IN" dirty="0"/>
+              <a:t>Seasonal agricultural data containing crop, environmental, resource, production, and economic attributes.</a:t>
+            </a:r>
+          </a:p>
+        </p:txBody>
+      </p:sp>
+      <p:sp>
+        <p:nvSpPr>
+          <p:cNvPr id="9" name="Title 8">
+            <a:extLst>
+              <a:ext uri="{FF2B5EF4-FFF2-40B4-BE49-F238E27FC236}">
+                <a16:creationId xmlns:a16="http://schemas.microsoft.com/office/drawing/2014/main" id="{085B3418-CFAA-462A-DDE2-12DBF1E44382}"/>
+              </a:ext>
+            </a:extLst>
+          </p:cNvPr>
+          <p:cNvSpPr>
+            <a:spLocks noGrp="1"/>
+          </p:cNvSpPr>
+          <p:nvPr>
+            <p:ph type="title"/>
+          </p:nvPr>
+        </p:nvSpPr>
+        <p:spPr>
+          <a:xfrm>
+            <a:off x="660399" y="430567"/>
+            <a:ext cx="5306291" cy="847817"/>
+          </a:xfrm>
+        </p:spPr>
+        <p:txBody>
+          <a:bodyPr>
+            <a:normAutofit/>
+          </a:bodyPr>
+          <a:lstStyle/>
+          <a:p>
+            <a:r>
+              <a:rPr lang="en-US" dirty="0"/>
+              <a:t>Technology Used</a:t>
+            </a:r>
+          </a:p>
+        </p:txBody>
+      </p:sp>
+    </p:spTree>
+    <p:extLst>
+      <p:ext uri="{BB962C8B-B14F-4D97-AF65-F5344CB8AC3E}">
+        <p14:creationId xmlns:p14="http://schemas.microsoft.com/office/powerpoint/2010/main" val="1729803612"/>
+      </p:ext>
+    </p:extLst>
+  </p:cSld>
+  <p:clrMapOvr>
+    <a:masterClrMapping/>
+  </p:clrMapOvr>
+  <p:timing>
+    <p:tnLst>
+      <p:par>
+        <p:cTn id="1" dur="indefinite" restart="never" nodeType="tmRoot">
+          <p:childTnLst>
+            <p:seq concurrent="1" nextAc="seek">
+              <p:cTn id="2" dur="indefinite" nodeType="mainSeq">
+                <p:childTnLst>
+                  <p:par>
+                    <p:cTn id="3" fill="hold">
+                      <p:stCondLst>
+                        <p:cond delay="indefinite"/>
+                      </p:stCondLst>
+                      <p:childTnLst>
+                        <p:par>
+                          <p:cTn id="4" fill="hold">
+                            <p:stCondLst>
+                              <p:cond delay="0"/>
+                            </p:stCondLst>
+                            <p:childTnLst>
+                              <p:par>
+                                <p:cTn id="5" presetID="53" presetClass="entr" presetSubtype="16" fill="hold" grpId="0" nodeType="clickEffect">
+                                  <p:stCondLst>
+                                    <p:cond delay="0"/>
+                                  </p:stCondLst>
+                                  <p:childTnLst>
+                                    <p:set>
+                                      <p:cBhvr>
+                                        <p:cTn id="6" dur="1" fill="hold">
+                                          <p:stCondLst>
+                                            <p:cond delay="0"/>
+                                          </p:stCondLst>
+                                        </p:cTn>
+                                        <p:tgtEl>
+                                          <p:spTgt spid="9"/>
+                                        </p:tgtEl>
+                                        <p:attrNameLst>
+                                          <p:attrName>style.visibility</p:attrName>
+                                        </p:attrNameLst>
+                                      </p:cBhvr>
+                                      <p:to>
+                                        <p:strVal val="visible"/>
+                                      </p:to>
+                                    </p:set>
+                                    <p:anim calcmode="lin" valueType="num">
+                                      <p:cBhvr>
+                                        <p:cTn id="7" dur="500" fill="hold"/>
+                                        <p:tgtEl>
+                                          <p:spTgt spid="9"/>
+                                        </p:tgtEl>
+                                        <p:attrNameLst>
+                                          <p:attrName>ppt_w</p:attrName>
+                                        </p:attrNameLst>
+                                      </p:cBhvr>
+                                      <p:tavLst>
+                                        <p:tav tm="0">
+                                          <p:val>
+                                            <p:fltVal val="0"/>
+                                          </p:val>
+                                        </p:tav>
+                                        <p:tav tm="100000">
+                                          <p:val>
+                                            <p:strVal val="#ppt_w"/>
+                                          </p:val>
+                                        </p:tav>
+                                      </p:tavLst>
+                                    </p:anim>
+                                    <p:anim calcmode="lin" valueType="num">
+                                      <p:cBhvr>
+                                        <p:cTn id="8" dur="500" fill="hold"/>
+                                        <p:tgtEl>
+                                          <p:spTgt spid="9"/>
+                                        </p:tgtEl>
+                                        <p:attrNameLst>
+                                          <p:attrName>ppt_h</p:attrName>
+                                        </p:attrNameLst>
+                                      </p:cBhvr>
+                                      <p:tavLst>
+                                        <p:tav tm="0">
+                                          <p:val>
+                                            <p:fltVal val="0"/>
+                                          </p:val>
+                                        </p:tav>
+                                        <p:tav tm="100000">
+                                          <p:val>
+                                            <p:strVal val="#ppt_h"/>
+                                          </p:val>
+                                        </p:tav>
+                                      </p:tavLst>
+                                    </p:anim>
+                                    <p:animEffect transition="in" filter="fade">
+                                      <p:cBhvr>
+                                        <p:cTn id="9" dur="500"/>
+                                        <p:tgtEl>
+                                          <p:spTgt spid="9"/>
+                                        </p:tgtEl>
+                                      </p:cBhvr>
+                                    </p:animEffect>
+                                  </p:childTnLst>
+                                </p:cTn>
+                              </p:par>
+                            </p:childTnLst>
+                          </p:cTn>
+                        </p:par>
+                      </p:childTnLst>
+                    </p:cTn>
+                  </p:par>
+                  <p:par>
+                    <p:cTn id="10" fill="hold">
+                      <p:stCondLst>
+                        <p:cond delay="indefinite"/>
+                      </p:stCondLst>
+                      <p:childTnLst>
+                        <p:par>
+                          <p:cTn id="11" fill="hold">
+                            <p:stCondLst>
+                              <p:cond delay="0"/>
+                            </p:stCondLst>
+                            <p:childTnLst>
+                              <p:par>
+                                <p:cTn id="12" presetID="42" presetClass="entr" presetSubtype="0" fill="hold" grpId="0" nodeType="clickEffect">
+                                  <p:stCondLst>
+                                    <p:cond delay="0"/>
+                                  </p:stCondLst>
+                                  <p:childTnLst>
+                                    <p:set>
+                                      <p:cBhvr>
+                                        <p:cTn id="13" dur="1" fill="hold">
+                                          <p:stCondLst>
+                                            <p:cond delay="0"/>
+                                          </p:stCondLst>
+                                        </p:cTn>
+                                        <p:tgtEl>
+                                          <p:spTgt spid="7">
+                                            <p:txEl>
+                                              <p:pRg st="0" end="0"/>
+                                            </p:txEl>
+                                          </p:spTgt>
+                                        </p:tgtEl>
+                                        <p:attrNameLst>
+                                          <p:attrName>style.visibility</p:attrName>
+                                        </p:attrNameLst>
+                                      </p:cBhvr>
+                                      <p:to>
+                                        <p:strVal val="visible"/>
+                                      </p:to>
+                                    </p:set>
+                                    <p:animEffect transition="in" filter="fade">
+                                      <p:cBhvr>
+                                        <p:cTn id="14" dur="1000"/>
+                                        <p:tgtEl>
+                                          <p:spTgt spid="7">
+                                            <p:txEl>
+                                              <p:pRg st="0" end="0"/>
+                                            </p:txEl>
+                                          </p:spTgt>
+                                        </p:tgtEl>
+                                      </p:cBhvr>
+                                    </p:animEffect>
+                                    <p:anim calcmode="lin" valueType="num">
+                                      <p:cBhvr>
+                                        <p:cTn id="15" dur="1000" fill="hold"/>
+                                        <p:tgtEl>
+                                          <p:spTgt spid="7">
+                                            <p:txEl>
+                                              <p:pRg st="0" end="0"/>
+                                            </p:txEl>
+                                          </p:spTgt>
+                                        </p:tgtEl>
+                                        <p:attrNameLst>
+                                          <p:attrName>ppt_x</p:attrName>
+                                        </p:attrNameLst>
+                                      </p:cBhvr>
+                                      <p:tavLst>
+                                        <p:tav tm="0">
+                                          <p:val>
+                                            <p:strVal val="#ppt_x"/>
+                                          </p:val>
+                                        </p:tav>
+                                        <p:tav tm="100000">
+                                          <p:val>
+                                            <p:strVal val="#ppt_x"/>
+                                          </p:val>
+                                        </p:tav>
+                                      </p:tavLst>
+                                    </p:anim>
+                                    <p:anim calcmode="lin" valueType="num">
+                                      <p:cBhvr>
+                                        <p:cTn id="16" dur="1000" fill="hold"/>
+                                        <p:tgtEl>
+                                          <p:spTgt spid="7">
+                                            <p:txEl>
+                                              <p:pRg st="0" end="0"/>
+                                            </p:txEl>
+                                          </p:spTgt>
+                                        </p:tgtEl>
+                                        <p:attrNameLst>
+                                          <p:attrName>ppt_y</p:attrName>
+                                        </p:attrNameLst>
+                                      </p:cBhvr>
+                                      <p:tavLst>
+                                        <p:tav tm="0">
+                                          <p:val>
+                                            <p:strVal val="#ppt_y+.1"/>
+                                          </p:val>
+                                        </p:tav>
+                                        <p:tav tm="100000">
+                                          <p:val>
+                                            <p:strVal val="#ppt_y"/>
+                                          </p:val>
+                                        </p:tav>
+                                      </p:tavLst>
+                                    </p:anim>
+                                  </p:childTnLst>
+                                </p:cTn>
+                              </p:par>
+                            </p:childTnLst>
+                          </p:cTn>
+                        </p:par>
+                      </p:childTnLst>
+                    </p:cTn>
+                  </p:par>
+                  <p:par>
+                    <p:cTn id="17" fill="hold">
+                      <p:stCondLst>
+                        <p:cond delay="indefinite"/>
+                      </p:stCondLst>
+                      <p:childTnLst>
+                        <p:par>
+                          <p:cTn id="18" fill="hold">
+                            <p:stCondLst>
+                              <p:cond delay="0"/>
+                            </p:stCondLst>
+                            <p:childTnLst>
+                              <p:par>
+                                <p:cTn id="19" presetID="42" presetClass="entr" presetSubtype="0" fill="hold" grpId="0" nodeType="clickEffect">
+                                  <p:stCondLst>
+                                    <p:cond delay="0"/>
+                                  </p:stCondLst>
+                                  <p:childTnLst>
+                                    <p:set>
+                                      <p:cBhvr>
+                                        <p:cTn id="20" dur="1" fill="hold">
+                                          <p:stCondLst>
+                                            <p:cond delay="0"/>
+                                          </p:stCondLst>
+                                        </p:cTn>
+                                        <p:tgtEl>
+                                          <p:spTgt spid="7">
+                                            <p:txEl>
+                                              <p:pRg st="1" end="1"/>
+                                            </p:txEl>
+                                          </p:spTgt>
+                                        </p:tgtEl>
+                                        <p:attrNameLst>
+                                          <p:attrName>style.visibility</p:attrName>
+                                        </p:attrNameLst>
+                                      </p:cBhvr>
+                                      <p:to>
+                                        <p:strVal val="visible"/>
+                                      </p:to>
+                                    </p:set>
+                                    <p:animEffect transition="in" filter="fade">
+                                      <p:cBhvr>
+                                        <p:cTn id="21" dur="1000"/>
+                                        <p:tgtEl>
+                                          <p:spTgt spid="7">
+                                            <p:txEl>
+                                              <p:pRg st="1" end="1"/>
+                                            </p:txEl>
+                                          </p:spTgt>
+                                        </p:tgtEl>
+                                      </p:cBhvr>
+                                    </p:animEffect>
+                                    <p:anim calcmode="lin" valueType="num">
+                                      <p:cBhvr>
+                                        <p:cTn id="22" dur="1000" fill="hold"/>
+                                        <p:tgtEl>
+                                          <p:spTgt spid="7">
+                                            <p:txEl>
+                                              <p:pRg st="1" end="1"/>
+                                            </p:txEl>
+                                          </p:spTgt>
+                                        </p:tgtEl>
+                                        <p:attrNameLst>
+                                          <p:attrName>ppt_x</p:attrName>
+                                        </p:attrNameLst>
+                                      </p:cBhvr>
+                                      <p:tavLst>
+                                        <p:tav tm="0">
+                                          <p:val>
+                                            <p:strVal val="#ppt_x"/>
+                                          </p:val>
+                                        </p:tav>
+                                        <p:tav tm="100000">
+                                          <p:val>
+                                            <p:strVal val="#ppt_x"/>
+                                          </p:val>
+                                        </p:tav>
+                                      </p:tavLst>
+                                    </p:anim>
+                                    <p:anim calcmode="lin" valueType="num">
+                                      <p:cBhvr>
+                                        <p:cTn id="23" dur="1000" fill="hold"/>
+                                        <p:tgtEl>
+                                          <p:spTgt spid="7">
+                                            <p:txEl>
+                                              <p:pRg st="1" end="1"/>
+                                            </p:txEl>
+                                          </p:spTgt>
+                                        </p:tgtEl>
+                                        <p:attrNameLst>
+                                          <p:attrName>ppt_y</p:attrName>
+                                        </p:attrNameLst>
+                                      </p:cBhvr>
+                                      <p:tavLst>
+                                        <p:tav tm="0">
+                                          <p:val>
+                                            <p:strVal val="#ppt_y+.1"/>
+                                          </p:val>
+                                        </p:tav>
+                                        <p:tav tm="100000">
+                                          <p:val>
+                                            <p:strVal val="#ppt_y"/>
+                                          </p:val>
+                                        </p:tav>
+                                      </p:tavLst>
+                                    </p:anim>
+                                  </p:childTnLst>
+                                </p:cTn>
+                              </p:par>
+                            </p:childTnLst>
+                          </p:cTn>
+                        </p:par>
+                      </p:childTnLst>
+                    </p:cTn>
+                  </p:par>
+                  <p:par>
+                    <p:cTn id="24" fill="hold">
+                      <p:stCondLst>
+                        <p:cond delay="indefinite"/>
+                      </p:stCondLst>
+                      <p:childTnLst>
+                        <p:par>
+                          <p:cTn id="25" fill="hold">
+                            <p:stCondLst>
+                              <p:cond delay="0"/>
+                            </p:stCondLst>
+                            <p:childTnLst>
+                              <p:par>
+                                <p:cTn id="26" presetID="42" presetClass="entr" presetSubtype="0" fill="hold" grpId="0" nodeType="clickEffect">
+                                  <p:stCondLst>
+                                    <p:cond delay="0"/>
+                                  </p:stCondLst>
+                                  <p:childTnLst>
+                                    <p:set>
+                                      <p:cBhvr>
+                                        <p:cTn id="27" dur="1" fill="hold">
+                                          <p:stCondLst>
+                                            <p:cond delay="0"/>
+                                          </p:stCondLst>
+                                        </p:cTn>
+                                        <p:tgtEl>
+                                          <p:spTgt spid="7">
+                                            <p:txEl>
+                                              <p:pRg st="2" end="2"/>
+                                            </p:txEl>
+                                          </p:spTgt>
+                                        </p:tgtEl>
+                                        <p:attrNameLst>
+                                          <p:attrName>style.visibility</p:attrName>
+                                        </p:attrNameLst>
+                                      </p:cBhvr>
+                                      <p:to>
+                                        <p:strVal val="visible"/>
+                                      </p:to>
+                                    </p:set>
+                                    <p:animEffect transition="in" filter="fade">
+                                      <p:cBhvr>
+                                        <p:cTn id="28" dur="1000"/>
+                                        <p:tgtEl>
+                                          <p:spTgt spid="7">
+                                            <p:txEl>
+                                              <p:pRg st="2" end="2"/>
+                                            </p:txEl>
+                                          </p:spTgt>
+                                        </p:tgtEl>
+                                      </p:cBhvr>
+                                    </p:animEffect>
+                                    <p:anim calcmode="lin" valueType="num">
+                                      <p:cBhvr>
+                                        <p:cTn id="29" dur="1000" fill="hold"/>
+                                        <p:tgtEl>
+                                          <p:spTgt spid="7">
+                                            <p:txEl>
+                                              <p:pRg st="2" end="2"/>
+                                            </p:txEl>
+                                          </p:spTgt>
+                                        </p:tgtEl>
+                                        <p:attrNameLst>
+                                          <p:attrName>ppt_x</p:attrName>
+                                        </p:attrNameLst>
+                                      </p:cBhvr>
+                                      <p:tavLst>
+                                        <p:tav tm="0">
+                                          <p:val>
+                                            <p:strVal val="#ppt_x"/>
+                                          </p:val>
+                                        </p:tav>
+                                        <p:tav tm="100000">
+                                          <p:val>
+                                            <p:strVal val="#ppt_x"/>
+                                          </p:val>
+                                        </p:tav>
+                                      </p:tavLst>
+                                    </p:anim>
+                                    <p:anim calcmode="lin" valueType="num">
+                                      <p:cBhvr>
+                                        <p:cTn id="30" dur="1000" fill="hold"/>
+                                        <p:tgtEl>
+                                          <p:spTgt spid="7">
+                                            <p:txEl>
+                                              <p:pRg st="2" end="2"/>
+                                            </p:txEl>
+                                          </p:spTgt>
+                                        </p:tgtEl>
+                                        <p:attrNameLst>
+                                          <p:attrName>ppt_y</p:attrName>
+                                        </p:attrNameLst>
+                                      </p:cBhvr>
+                                      <p:tavLst>
+                                        <p:tav tm="0">
+                                          <p:val>
+                                            <p:strVal val="#ppt_y+.1"/>
+                                          </p:val>
+                                        </p:tav>
+                                        <p:tav tm="100000">
+                                          <p:val>
+                                            <p:strVal val="#ppt_y"/>
+                                          </p:val>
+                                        </p:tav>
+                                      </p:tavLst>
+                                    </p:anim>
+                                  </p:childTnLst>
+                                </p:cTn>
+                              </p:par>
+                            </p:childTnLst>
+                          </p:cTn>
+                        </p:par>
+                      </p:childTnLst>
+                    </p:cTn>
+                  </p:par>
+                  <p:par>
+                    <p:cTn id="31" fill="hold">
+                      <p:stCondLst>
+                        <p:cond delay="indefinite"/>
+                      </p:stCondLst>
+                      <p:childTnLst>
+                        <p:par>
+                          <p:cTn id="32" fill="hold">
+                            <p:stCondLst>
+                              <p:cond delay="0"/>
+                            </p:stCondLst>
+                            <p:childTnLst>
+                              <p:par>
+                                <p:cTn id="33" presetID="42" presetClass="entr" presetSubtype="0" fill="hold" grpId="0" nodeType="clickEffect">
+                                  <p:stCondLst>
+                                    <p:cond delay="0"/>
+                                  </p:stCondLst>
+                                  <p:childTnLst>
+                                    <p:set>
+                                      <p:cBhvr>
+                                        <p:cTn id="34" dur="1" fill="hold">
+                                          <p:stCondLst>
+                                            <p:cond delay="0"/>
+                                          </p:stCondLst>
+                                        </p:cTn>
+                                        <p:tgtEl>
+                                          <p:spTgt spid="7">
+                                            <p:txEl>
+                                              <p:pRg st="3" end="3"/>
+                                            </p:txEl>
+                                          </p:spTgt>
+                                        </p:tgtEl>
+                                        <p:attrNameLst>
+                                          <p:attrName>style.visibility</p:attrName>
+                                        </p:attrNameLst>
+                                      </p:cBhvr>
+                                      <p:to>
+                                        <p:strVal val="visible"/>
+                                      </p:to>
+                                    </p:set>
+                                    <p:animEffect transition="in" filter="fade">
+                                      <p:cBhvr>
+                                        <p:cTn id="35" dur="1000"/>
+                                        <p:tgtEl>
+                                          <p:spTgt spid="7">
+                                            <p:txEl>
+                                              <p:pRg st="3" end="3"/>
+                                            </p:txEl>
+                                          </p:spTgt>
+                                        </p:tgtEl>
+                                      </p:cBhvr>
+                                    </p:animEffect>
+                                    <p:anim calcmode="lin" valueType="num">
+                                      <p:cBhvr>
+                                        <p:cTn id="36" dur="1000" fill="hold"/>
+                                        <p:tgtEl>
+                                          <p:spTgt spid="7">
+                                            <p:txEl>
+                                              <p:pRg st="3" end="3"/>
+                                            </p:txEl>
+                                          </p:spTgt>
+                                        </p:tgtEl>
+                                        <p:attrNameLst>
+                                          <p:attrName>ppt_x</p:attrName>
+                                        </p:attrNameLst>
+                                      </p:cBhvr>
+                                      <p:tavLst>
+                                        <p:tav tm="0">
+                                          <p:val>
+                                            <p:strVal val="#ppt_x"/>
+                                          </p:val>
+                                        </p:tav>
+                                        <p:tav tm="100000">
+                                          <p:val>
+                                            <p:strVal val="#ppt_x"/>
+                                          </p:val>
+                                        </p:tav>
+                                      </p:tavLst>
+                                    </p:anim>
+                                    <p:anim calcmode="lin" valueType="num">
+                                      <p:cBhvr>
+                                        <p:cTn id="37" dur="1000" fill="hold"/>
+                                        <p:tgtEl>
+                                          <p:spTgt spid="7">
+                                            <p:txEl>
+                                              <p:pRg st="3" end="3"/>
+                                            </p:txEl>
+                                          </p:spTgt>
+                                        </p:tgtEl>
+                                        <p:attrNameLst>
+                                          <p:attrName>ppt_y</p:attrName>
+                                        </p:attrNameLst>
+                                      </p:cBhvr>
+                                      <p:tavLst>
+                                        <p:tav tm="0">
+                                          <p:val>
+                                            <p:strVal val="#ppt_y+.1"/>
+                                          </p:val>
+                                        </p:tav>
+                                        <p:tav tm="100000">
+                                          <p:val>
+                                            <p:strVal val="#ppt_y"/>
+                                          </p:val>
+                                        </p:tav>
+                                      </p:tavLst>
+                                    </p:anim>
+                                  </p:childTnLst>
+                                </p:cTn>
+                              </p:par>
+                            </p:childTnLst>
+                          </p:cTn>
+                        </p:par>
+                      </p:childTnLst>
+                    </p:cTn>
+                  </p:par>
+                  <p:par>
+                    <p:cTn id="38" fill="hold">
+                      <p:stCondLst>
+                        <p:cond delay="indefinite"/>
+                      </p:stCondLst>
+                      <p:childTnLst>
+                        <p:par>
+                          <p:cTn id="39" fill="hold">
+                            <p:stCondLst>
+                              <p:cond delay="0"/>
+                            </p:stCondLst>
+                            <p:childTnLst>
+                              <p:par>
+                                <p:cTn id="40" presetID="42" presetClass="entr" presetSubtype="0" fill="hold" grpId="0" nodeType="clickEffect">
+                                  <p:stCondLst>
+                                    <p:cond delay="0"/>
+                                  </p:stCondLst>
+                                  <p:childTnLst>
+                                    <p:set>
+                                      <p:cBhvr>
+                                        <p:cTn id="41" dur="1" fill="hold">
+                                          <p:stCondLst>
+                                            <p:cond delay="0"/>
+                                          </p:stCondLst>
+                                        </p:cTn>
+                                        <p:tgtEl>
+                                          <p:spTgt spid="7">
+                                            <p:txEl>
+                                              <p:pRg st="4" end="4"/>
+                                            </p:txEl>
+                                          </p:spTgt>
+                                        </p:tgtEl>
+                                        <p:attrNameLst>
+                                          <p:attrName>style.visibility</p:attrName>
+                                        </p:attrNameLst>
+                                      </p:cBhvr>
+                                      <p:to>
+                                        <p:strVal val="visible"/>
+                                      </p:to>
+                                    </p:set>
+                                    <p:animEffect transition="in" filter="fade">
+                                      <p:cBhvr>
+                                        <p:cTn id="42" dur="1000"/>
+                                        <p:tgtEl>
+                                          <p:spTgt spid="7">
+                                            <p:txEl>
+                                              <p:pRg st="4" end="4"/>
+                                            </p:txEl>
+                                          </p:spTgt>
+                                        </p:tgtEl>
+                                      </p:cBhvr>
+                                    </p:animEffect>
+                                    <p:anim calcmode="lin" valueType="num">
+                                      <p:cBhvr>
+                                        <p:cTn id="43" dur="1000" fill="hold"/>
+                                        <p:tgtEl>
+                                          <p:spTgt spid="7">
+                                            <p:txEl>
+                                              <p:pRg st="4" end="4"/>
+                                            </p:txEl>
+                                          </p:spTgt>
+                                        </p:tgtEl>
+                                        <p:attrNameLst>
+                                          <p:attrName>ppt_x</p:attrName>
+                                        </p:attrNameLst>
+                                      </p:cBhvr>
+                                      <p:tavLst>
+                                        <p:tav tm="0">
+                                          <p:val>
+                                            <p:strVal val="#ppt_x"/>
+                                          </p:val>
+                                        </p:tav>
+                                        <p:tav tm="100000">
+                                          <p:val>
+                                            <p:strVal val="#ppt_x"/>
+                                          </p:val>
+                                        </p:tav>
+                                      </p:tavLst>
+                                    </p:anim>
+                                    <p:anim calcmode="lin" valueType="num">
+                                      <p:cBhvr>
+                                        <p:cTn id="44" dur="1000" fill="hold"/>
+                                        <p:tgtEl>
+                                          <p:spTgt spid="7">
+                                            <p:txEl>
+                                              <p:pRg st="4" end="4"/>
+                                            </p:txEl>
+                                          </p:spTgt>
+                                        </p:tgtEl>
+                                        <p:attrNameLst>
+                                          <p:attrName>ppt_y</p:attrName>
+                                        </p:attrNameLst>
+                                      </p:cBhvr>
+                                      <p:tavLst>
+                                        <p:tav tm="0">
+                                          <p:val>
+                                            <p:strVal val="#ppt_y+.1"/>
+                                          </p:val>
+                                        </p:tav>
+                                        <p:tav tm="100000">
+                                          <p:val>
+                                            <p:strVal val="#ppt_y"/>
+                                          </p:val>
+                                        </p:tav>
+                                      </p:tavLst>
+                                    </p:anim>
+                                  </p:childTnLst>
+                                </p:cTn>
+                              </p:par>
+                            </p:childTnLst>
+                          </p:cTn>
+                        </p:par>
+                      </p:childTnLst>
+                    </p:cTn>
+                  </p:par>
+                  <p:par>
+                    <p:cTn id="45" fill="hold">
+                      <p:stCondLst>
+                        <p:cond delay="indefinite"/>
+                      </p:stCondLst>
+                      <p:childTnLst>
+                        <p:par>
+                          <p:cTn id="46" fill="hold">
+                            <p:stCondLst>
+                              <p:cond delay="0"/>
+                            </p:stCondLst>
+                            <p:childTnLst>
+                              <p:par>
+                                <p:cTn id="47" presetID="42" presetClass="entr" presetSubtype="0" fill="hold" grpId="0" nodeType="clickEffect">
+                                  <p:stCondLst>
+                                    <p:cond delay="0"/>
+                                  </p:stCondLst>
+                                  <p:childTnLst>
+                                    <p:set>
+                                      <p:cBhvr>
+                                        <p:cTn id="48" dur="1" fill="hold">
+                                          <p:stCondLst>
+                                            <p:cond delay="0"/>
+                                          </p:stCondLst>
+                                        </p:cTn>
+                                        <p:tgtEl>
+                                          <p:spTgt spid="7">
+                                            <p:txEl>
+                                              <p:pRg st="5" end="5"/>
+                                            </p:txEl>
+                                          </p:spTgt>
+                                        </p:tgtEl>
+                                        <p:attrNameLst>
+                                          <p:attrName>style.visibility</p:attrName>
+                                        </p:attrNameLst>
+                                      </p:cBhvr>
+                                      <p:to>
+                                        <p:strVal val="visible"/>
+                                      </p:to>
+                                    </p:set>
+                                    <p:animEffect transition="in" filter="fade">
+                                      <p:cBhvr>
+                                        <p:cTn id="49" dur="1000"/>
+                                        <p:tgtEl>
+                                          <p:spTgt spid="7">
+                                            <p:txEl>
+                                              <p:pRg st="5" end="5"/>
+                                            </p:txEl>
+                                          </p:spTgt>
+                                        </p:tgtEl>
+                                      </p:cBhvr>
+                                    </p:animEffect>
+                                    <p:anim calcmode="lin" valueType="num">
+                                      <p:cBhvr>
+                                        <p:cTn id="50" dur="1000" fill="hold"/>
+                                        <p:tgtEl>
+                                          <p:spTgt spid="7">
+                                            <p:txEl>
+                                              <p:pRg st="5" end="5"/>
+                                            </p:txEl>
+                                          </p:spTgt>
+                                        </p:tgtEl>
+                                        <p:attrNameLst>
+                                          <p:attrName>ppt_x</p:attrName>
+                                        </p:attrNameLst>
+                                      </p:cBhvr>
+                                      <p:tavLst>
+                                        <p:tav tm="0">
+                                          <p:val>
+                                            <p:strVal val="#ppt_x"/>
+                                          </p:val>
+                                        </p:tav>
+                                        <p:tav tm="100000">
+                                          <p:val>
+                                            <p:strVal val="#ppt_x"/>
+                                          </p:val>
+                                        </p:tav>
+                                      </p:tavLst>
+                                    </p:anim>
+                                    <p:anim calcmode="lin" valueType="num">
+                                      <p:cBhvr>
+                                        <p:cTn id="51" dur="1000" fill="hold"/>
+                                        <p:tgtEl>
+                                          <p:spTgt spid="7">
+                                            <p:txEl>
+                                              <p:pRg st="5" end="5"/>
+                                            </p:txEl>
+                                          </p:spTgt>
+                                        </p:tgtEl>
+                                        <p:attrNameLst>
+                                          <p:attrName>ppt_y</p:attrName>
+                                        </p:attrNameLst>
+                                      </p:cBhvr>
+                                      <p:tavLst>
+                                        <p:tav tm="0">
+                                          <p:val>
+                                            <p:strVal val="#ppt_y+.1"/>
+                                          </p:val>
+                                        </p:tav>
+                                        <p:tav tm="100000">
+                                          <p:val>
+                                            <p:strVal val="#ppt_y"/>
+                                          </p:val>
+                                        </p:tav>
+                                      </p:tavLst>
+                                    </p:anim>
+                                  </p:childTnLst>
+                                </p:cTn>
+                              </p:par>
+                            </p:childTnLst>
+                          </p:cTn>
+                        </p:par>
+                      </p:childTnLst>
+                    </p:cTn>
+                  </p:par>
+                </p:childTnLst>
+              </p:cTn>
+              <p:prevCondLst>
+                <p:cond evt="onPrev" delay="0">
+                  <p:tgtEl>
+                    <p:sldTgt/>
+                  </p:tgtEl>
+                </p:cond>
+              </p:prevCondLst>
+              <p:nextCondLst>
+                <p:cond evt="onNext" delay="0">
+                  <p:tgtEl>
+                    <p:sldTgt/>
+                  </p:tgtEl>
+                </p:cond>
+              </p:nextCondLst>
+            </p:seq>
+          </p:childTnLst>
+        </p:cTn>
+      </p:par>
+    </p:tnLst>
+    <p:bldLst>
+      <p:bldP spid="7" grpId="0" build="p"/>
+      <p:bldP spid="9" grpId="0"/>
+    </p:bldLst>
+  </p:timing>
+</p:sld>
+</file>
+
+<file path=ppt/slides/slide9.xml><?xml version="1.0" encoding="utf-8"?>
 <p:sld xmlns:a="http://schemas.openxmlformats.org/drawingml/2006/main" xmlns:r="http://schemas.openxmlformats.org/officeDocument/2006/relationships" xmlns:p="http://schemas.openxmlformats.org/presentationml/2006/main">
   <p:cSld>
     <p:spTree>
@@ -28064,732 +29190,6 @@
     <p:extLst>
       <p:ext uri="{BB962C8B-B14F-4D97-AF65-F5344CB8AC3E}">
         <p14:creationId xmlns:p14="http://schemas.microsoft.com/office/powerpoint/2010/main" val="1086225493"/>
-      </p:ext>
-    </p:extLst>
-  </p:cSld>
-  <p:clrMapOvr>
-    <a:masterClrMapping/>
-  </p:clrMapOvr>
-  <p:timing>
-    <p:tnLst>
-      <p:par>
-        <p:cTn id="1" dur="indefinite" restart="never" nodeType="tmRoot">
-          <p:childTnLst>
-            <p:seq concurrent="1" nextAc="seek">
-              <p:cTn id="2" dur="indefinite" nodeType="mainSeq">
-                <p:childTnLst>
-                  <p:par>
-                    <p:cTn id="3" fill="hold">
-                      <p:stCondLst>
-                        <p:cond delay="indefinite"/>
-                      </p:stCondLst>
-                      <p:childTnLst>
-                        <p:par>
-                          <p:cTn id="4" fill="hold">
-                            <p:stCondLst>
-                              <p:cond delay="0"/>
-                            </p:stCondLst>
-                            <p:childTnLst>
-                              <p:par>
-                                <p:cTn id="5" presetID="53" presetClass="entr" presetSubtype="16" fill="hold" grpId="0" nodeType="clickEffect">
-                                  <p:stCondLst>
-                                    <p:cond delay="0"/>
-                                  </p:stCondLst>
-                                  <p:childTnLst>
-                                    <p:set>
-                                      <p:cBhvr>
-                                        <p:cTn id="6" dur="1" fill="hold">
-                                          <p:stCondLst>
-                                            <p:cond delay="0"/>
-                                          </p:stCondLst>
-                                        </p:cTn>
-                                        <p:tgtEl>
-                                          <p:spTgt spid="4"/>
-                                        </p:tgtEl>
-                                        <p:attrNameLst>
-                                          <p:attrName>style.visibility</p:attrName>
-                                        </p:attrNameLst>
-                                      </p:cBhvr>
-                                      <p:to>
-                                        <p:strVal val="visible"/>
-                                      </p:to>
-                                    </p:set>
-                                    <p:anim calcmode="lin" valueType="num">
-                                      <p:cBhvr>
-                                        <p:cTn id="7" dur="500" fill="hold"/>
-                                        <p:tgtEl>
-                                          <p:spTgt spid="4"/>
-                                        </p:tgtEl>
-                                        <p:attrNameLst>
-                                          <p:attrName>ppt_w</p:attrName>
-                                        </p:attrNameLst>
-                                      </p:cBhvr>
-                                      <p:tavLst>
-                                        <p:tav tm="0">
-                                          <p:val>
-                                            <p:fltVal val="0"/>
-                                          </p:val>
-                                        </p:tav>
-                                        <p:tav tm="100000">
-                                          <p:val>
-                                            <p:strVal val="#ppt_w"/>
-                                          </p:val>
-                                        </p:tav>
-                                      </p:tavLst>
-                                    </p:anim>
-                                    <p:anim calcmode="lin" valueType="num">
-                                      <p:cBhvr>
-                                        <p:cTn id="8" dur="500" fill="hold"/>
-                                        <p:tgtEl>
-                                          <p:spTgt spid="4"/>
-                                        </p:tgtEl>
-                                        <p:attrNameLst>
-                                          <p:attrName>ppt_h</p:attrName>
-                                        </p:attrNameLst>
-                                      </p:cBhvr>
-                                      <p:tavLst>
-                                        <p:tav tm="0">
-                                          <p:val>
-                                            <p:fltVal val="0"/>
-                                          </p:val>
-                                        </p:tav>
-                                        <p:tav tm="100000">
-                                          <p:val>
-                                            <p:strVal val="#ppt_h"/>
-                                          </p:val>
-                                        </p:tav>
-                                      </p:tavLst>
-                                    </p:anim>
-                                    <p:animEffect transition="in" filter="fade">
-                                      <p:cBhvr>
-                                        <p:cTn id="9" dur="500"/>
-                                        <p:tgtEl>
-                                          <p:spTgt spid="4"/>
-                                        </p:tgtEl>
-                                      </p:cBhvr>
-                                    </p:animEffect>
-                                  </p:childTnLst>
-                                </p:cTn>
-                              </p:par>
-                            </p:childTnLst>
-                          </p:cTn>
-                        </p:par>
-                      </p:childTnLst>
-                    </p:cTn>
-                  </p:par>
-                  <p:par>
-                    <p:cTn id="10" fill="hold">
-                      <p:stCondLst>
-                        <p:cond delay="indefinite"/>
-                      </p:stCondLst>
-                      <p:childTnLst>
-                        <p:par>
-                          <p:cTn id="11" fill="hold">
-                            <p:stCondLst>
-                              <p:cond delay="0"/>
-                            </p:stCondLst>
-                            <p:childTnLst>
-                              <p:par>
-                                <p:cTn id="12" presetID="42" presetClass="entr" presetSubtype="0" fill="hold" grpId="0" nodeType="clickEffect" nodePh="1">
-                                  <p:stCondLst>
-                                    <p:cond delay="0"/>
-                                  </p:stCondLst>
-                                  <p:endCondLst>
-                                    <p:cond evt="begin" delay="0">
-                                      <p:tn val="12"/>
-                                    </p:cond>
-                                  </p:endCondLst>
-                                  <p:childTnLst>
-                                    <p:set>
-                                      <p:cBhvr>
-                                        <p:cTn id="13" dur="1" fill="hold">
-                                          <p:stCondLst>
-                                            <p:cond delay="0"/>
-                                          </p:stCondLst>
-                                        </p:cTn>
-                                        <p:tgtEl>
-                                          <p:spTgt spid="8"/>
-                                        </p:tgtEl>
-                                        <p:attrNameLst>
-                                          <p:attrName>style.visibility</p:attrName>
-                                        </p:attrNameLst>
-                                      </p:cBhvr>
-                                      <p:to>
-                                        <p:strVal val="visible"/>
-                                      </p:to>
-                                    </p:set>
-                                    <p:animEffect transition="in" filter="fade">
-                                      <p:cBhvr>
-                                        <p:cTn id="14" dur="1000"/>
-                                        <p:tgtEl>
-                                          <p:spTgt spid="8"/>
-                                        </p:tgtEl>
-                                      </p:cBhvr>
-                                    </p:animEffect>
-                                    <p:anim calcmode="lin" valueType="num">
-                                      <p:cBhvr>
-                                        <p:cTn id="15" dur="1000" fill="hold"/>
-                                        <p:tgtEl>
-                                          <p:spTgt spid="8"/>
-                                        </p:tgtEl>
-                                        <p:attrNameLst>
-                                          <p:attrName>ppt_x</p:attrName>
-                                        </p:attrNameLst>
-                                      </p:cBhvr>
-                                      <p:tavLst>
-                                        <p:tav tm="0">
-                                          <p:val>
-                                            <p:strVal val="#ppt_x"/>
-                                          </p:val>
-                                        </p:tav>
-                                        <p:tav tm="100000">
-                                          <p:val>
-                                            <p:strVal val="#ppt_x"/>
-                                          </p:val>
-                                        </p:tav>
-                                      </p:tavLst>
-                                    </p:anim>
-                                    <p:anim calcmode="lin" valueType="num">
-                                      <p:cBhvr>
-                                        <p:cTn id="16" dur="1000" fill="hold"/>
-                                        <p:tgtEl>
-                                          <p:spTgt spid="8"/>
-                                        </p:tgtEl>
-                                        <p:attrNameLst>
-                                          <p:attrName>ppt_y</p:attrName>
-                                        </p:attrNameLst>
-                                      </p:cBhvr>
-                                      <p:tavLst>
-                                        <p:tav tm="0">
-                                          <p:val>
-                                            <p:strVal val="#ppt_y+.1"/>
-                                          </p:val>
-                                        </p:tav>
-                                        <p:tav tm="100000">
-                                          <p:val>
-                                            <p:strVal val="#ppt_y"/>
-                                          </p:val>
-                                        </p:tav>
-                                      </p:tavLst>
-                                    </p:anim>
-                                  </p:childTnLst>
-                                </p:cTn>
-                              </p:par>
-                            </p:childTnLst>
-                          </p:cTn>
-                        </p:par>
-                      </p:childTnLst>
-                    </p:cTn>
-                  </p:par>
-                </p:childTnLst>
-              </p:cTn>
-              <p:prevCondLst>
-                <p:cond evt="onPrev" delay="0">
-                  <p:tgtEl>
-                    <p:sldTgt/>
-                  </p:tgtEl>
-                </p:cond>
-              </p:prevCondLst>
-              <p:nextCondLst>
-                <p:cond evt="onNext" delay="0">
-                  <p:tgtEl>
-                    <p:sldTgt/>
-                  </p:tgtEl>
-                </p:cond>
-              </p:nextCondLst>
-            </p:seq>
-          </p:childTnLst>
-        </p:cTn>
-      </p:par>
-    </p:tnLst>
-    <p:bldLst>
-      <p:bldP spid="4" grpId="0"/>
-      <p:bldP spid="8" grpId="0"/>
-    </p:bldLst>
-  </p:timing>
-</p:sld>
-</file>
-
-<file path=ppt/slides/slide9.xml><?xml version="1.0" encoding="utf-8"?>
-<p:sld xmlns:a="http://schemas.openxmlformats.org/drawingml/2006/main" xmlns:r="http://schemas.openxmlformats.org/officeDocument/2006/relationships" xmlns:p="http://schemas.openxmlformats.org/presentationml/2006/main">
-  <p:cSld>
-    <p:spTree>
-      <p:nvGrpSpPr>
-        <p:cNvPr id="1" name="">
-          <a:extLst>
-            <a:ext uri="{FF2B5EF4-FFF2-40B4-BE49-F238E27FC236}">
-              <a16:creationId xmlns:a16="http://schemas.microsoft.com/office/drawing/2014/main" id="{B9EAAE43-B138-25CD-D01F-41DB388556CE}"/>
-            </a:ext>
-          </a:extLst>
-        </p:cNvPr>
-        <p:cNvGrpSpPr/>
-        <p:nvPr/>
-      </p:nvGrpSpPr>
-      <p:grpSpPr>
-        <a:xfrm>
-          <a:off x="0" y="0"/>
-          <a:ext cx="0" cy="0"/>
-          <a:chOff x="0" y="0"/>
-          <a:chExt cx="0" cy="0"/>
-        </a:xfrm>
-      </p:grpSpPr>
-      <p:pic>
-        <p:nvPicPr>
-          <p:cNvPr id="5" name="Picture 4">
-            <a:extLst>
-              <a:ext uri="{FF2B5EF4-FFF2-40B4-BE49-F238E27FC236}">
-                <a16:creationId xmlns:a16="http://schemas.microsoft.com/office/drawing/2014/main" id="{BFCF24DA-3CDC-4D87-9335-AB913C783F76}"/>
-              </a:ext>
-            </a:extLst>
-          </p:cNvPr>
-          <p:cNvPicPr>
-            <a:picLocks noChangeAspect="1"/>
-          </p:cNvPicPr>
-          <p:nvPr/>
-        </p:nvPicPr>
-        <p:blipFill rotWithShape="1">
-          <a:blip r:embed="rId2"/>
-          <a:srcRect t="96181"/>
-          <a:stretch/>
-        </p:blipFill>
-        <p:spPr>
-          <a:xfrm>
-            <a:off x="675957" y="6471920"/>
-            <a:ext cx="2143125" cy="193040"/>
-          </a:xfrm>
-          <a:prstGeom prst="rect">
-            <a:avLst/>
-          </a:prstGeom>
-        </p:spPr>
-      </p:pic>
-      <p:sp>
-        <p:nvSpPr>
-          <p:cNvPr id="4" name="Title 3">
-            <a:extLst>
-              <a:ext uri="{FF2B5EF4-FFF2-40B4-BE49-F238E27FC236}">
-                <a16:creationId xmlns:a16="http://schemas.microsoft.com/office/drawing/2014/main" id="{6D5AF756-BADB-9E87-14AC-F87A8C7463BF}"/>
-              </a:ext>
-            </a:extLst>
-          </p:cNvPr>
-          <p:cNvSpPr>
-            <a:spLocks noGrp="1"/>
-          </p:cNvSpPr>
-          <p:nvPr>
-            <p:ph type="title"/>
-          </p:nvPr>
-        </p:nvSpPr>
-        <p:spPr>
-          <a:xfrm>
-            <a:off x="675957" y="370589"/>
-            <a:ext cx="2981643" cy="830997"/>
-          </a:xfrm>
-        </p:spPr>
-        <p:txBody>
-          <a:bodyPr>
-            <a:normAutofit/>
-          </a:bodyPr>
-          <a:lstStyle/>
-          <a:p>
-            <a:r>
-              <a:rPr lang="en-GB" dirty="0"/>
-              <a:t>RESULTS </a:t>
-            </a:r>
-            <a:endParaRPr lang="en-IN" dirty="0"/>
-          </a:p>
-        </p:txBody>
-      </p:sp>
-      <p:sp>
-        <p:nvSpPr>
-          <p:cNvPr id="8" name="Text Placeholder 30">
-            <a:extLst>
-              <a:ext uri="{FF2B5EF4-FFF2-40B4-BE49-F238E27FC236}">
-                <a16:creationId xmlns:a16="http://schemas.microsoft.com/office/drawing/2014/main" id="{0E149068-B429-662F-714A-0DD8CE171A51}"/>
-              </a:ext>
-            </a:extLst>
-          </p:cNvPr>
-          <p:cNvSpPr txBox="1">
-            <a:spLocks/>
-          </p:cNvSpPr>
-          <p:nvPr/>
-        </p:nvSpPr>
-        <p:spPr>
-          <a:xfrm>
-            <a:off x="4345694" y="1275371"/>
-            <a:ext cx="3343561" cy="666078"/>
-          </a:xfrm>
-          <a:prstGeom prst="rect">
-            <a:avLst/>
-          </a:prstGeom>
-        </p:spPr>
-        <p:txBody>
-          <a:bodyPr vert="horz" lIns="91440" tIns="45720" rIns="91440" bIns="45720" rtlCol="0">
-            <a:normAutofit/>
-          </a:bodyPr>
-          <a:lstStyle>
-            <a:lvl1pPr marL="0" indent="0" algn="ctr" defTabSz="457200" rtl="0" eaLnBrk="1" latinLnBrk="0" hangingPunct="1">
-              <a:spcBef>
-                <a:spcPts val="1000"/>
-              </a:spcBef>
-              <a:spcAft>
-                <a:spcPts val="0"/>
-              </a:spcAft>
-              <a:buClr>
-                <a:schemeClr val="accent1"/>
-              </a:buClr>
-              <a:buSzPct val="80000"/>
-              <a:buFont typeface="Wingdings 3" charset="2"/>
-              <a:buNone/>
-              <a:defRPr lang="en-US" sz="1600" kern="1200" dirty="0" smtClean="0">
-                <a:solidFill>
-                  <a:schemeClr val="tx1"/>
-                </a:solidFill>
-                <a:latin typeface="+mn-lt"/>
-                <a:ea typeface="+mn-ea"/>
-                <a:cs typeface="+mn-cs"/>
-              </a:defRPr>
-            </a:lvl1pPr>
-            <a:lvl2pPr marL="742950" indent="-285750" algn="l" defTabSz="457200" rtl="0" eaLnBrk="1" latinLnBrk="0" hangingPunct="1">
-              <a:spcBef>
-                <a:spcPts val="1000"/>
-              </a:spcBef>
-              <a:spcAft>
-                <a:spcPts val="0"/>
-              </a:spcAft>
-              <a:buClr>
-                <a:schemeClr val="accent1"/>
-              </a:buClr>
-              <a:buSzPct val="80000"/>
-              <a:buFont typeface="Wingdings 3" charset="2"/>
-              <a:buChar char=""/>
-              <a:defRPr sz="1600" kern="1200">
-                <a:solidFill>
-                  <a:schemeClr val="tx1">
-                    <a:lumMod val="75000"/>
-                    <a:lumOff val="25000"/>
-                  </a:schemeClr>
-                </a:solidFill>
-                <a:latin typeface="+mn-lt"/>
-                <a:ea typeface="+mn-ea"/>
-                <a:cs typeface="+mn-cs"/>
-              </a:defRPr>
-            </a:lvl2pPr>
-            <a:lvl3pPr marL="1143000" indent="-228600" algn="l" defTabSz="457200" rtl="0" eaLnBrk="1" latinLnBrk="0" hangingPunct="1">
-              <a:spcBef>
-                <a:spcPts val="1000"/>
-              </a:spcBef>
-              <a:spcAft>
-                <a:spcPts val="0"/>
-              </a:spcAft>
-              <a:buClr>
-                <a:schemeClr val="accent1"/>
-              </a:buClr>
-              <a:buSzPct val="80000"/>
-              <a:buFont typeface="Wingdings 3" charset="2"/>
-              <a:buChar char=""/>
-              <a:defRPr sz="1400" kern="1200">
-                <a:solidFill>
-                  <a:schemeClr val="tx1">
-                    <a:lumMod val="75000"/>
-                    <a:lumOff val="25000"/>
-                  </a:schemeClr>
-                </a:solidFill>
-                <a:latin typeface="+mn-lt"/>
-                <a:ea typeface="+mn-ea"/>
-                <a:cs typeface="+mn-cs"/>
-              </a:defRPr>
-            </a:lvl3pPr>
-            <a:lvl4pPr marL="1600200" indent="-228600" algn="l" defTabSz="457200" rtl="0" eaLnBrk="1" latinLnBrk="0" hangingPunct="1">
-              <a:spcBef>
-                <a:spcPts val="1000"/>
-              </a:spcBef>
-              <a:spcAft>
-                <a:spcPts val="0"/>
-              </a:spcAft>
-              <a:buClr>
-                <a:schemeClr val="accent1"/>
-              </a:buClr>
-              <a:buSzPct val="80000"/>
-              <a:buFont typeface="Wingdings 3" charset="2"/>
-              <a:buChar char=""/>
-              <a:defRPr sz="1200" kern="1200">
-                <a:solidFill>
-                  <a:schemeClr val="tx1">
-                    <a:lumMod val="75000"/>
-                    <a:lumOff val="25000"/>
-                  </a:schemeClr>
-                </a:solidFill>
-                <a:latin typeface="+mn-lt"/>
-                <a:ea typeface="+mn-ea"/>
-                <a:cs typeface="+mn-cs"/>
-              </a:defRPr>
-            </a:lvl4pPr>
-            <a:lvl5pPr marL="2057400" indent="-228600" algn="l" defTabSz="457200" rtl="0" eaLnBrk="1" latinLnBrk="0" hangingPunct="1">
-              <a:spcBef>
-                <a:spcPts val="1000"/>
-              </a:spcBef>
-              <a:spcAft>
-                <a:spcPts val="0"/>
-              </a:spcAft>
-              <a:buClr>
-                <a:schemeClr val="accent1"/>
-              </a:buClr>
-              <a:buSzPct val="80000"/>
-              <a:buFont typeface="Wingdings 3" charset="2"/>
-              <a:buChar char=""/>
-              <a:defRPr sz="1200" kern="1200">
-                <a:solidFill>
-                  <a:schemeClr val="tx1">
-                    <a:lumMod val="75000"/>
-                    <a:lumOff val="25000"/>
-                  </a:schemeClr>
-                </a:solidFill>
-                <a:latin typeface="+mn-lt"/>
-                <a:ea typeface="+mn-ea"/>
-                <a:cs typeface="+mn-cs"/>
-              </a:defRPr>
-            </a:lvl5pPr>
-            <a:lvl6pPr marL="2514600" indent="-228600" algn="l" defTabSz="457200" rtl="0" eaLnBrk="1" latinLnBrk="0" hangingPunct="1">
-              <a:spcBef>
-                <a:spcPts val="1000"/>
-              </a:spcBef>
-              <a:spcAft>
-                <a:spcPts val="0"/>
-              </a:spcAft>
-              <a:buClr>
-                <a:schemeClr val="accent1"/>
-              </a:buClr>
-              <a:buSzPct val="80000"/>
-              <a:buFont typeface="Wingdings 3" charset="2"/>
-              <a:buChar char=""/>
-              <a:defRPr sz="1200" kern="1200">
-                <a:solidFill>
-                  <a:schemeClr val="tx1">
-                    <a:lumMod val="75000"/>
-                    <a:lumOff val="25000"/>
-                  </a:schemeClr>
-                </a:solidFill>
-                <a:latin typeface="+mn-lt"/>
-                <a:ea typeface="+mn-ea"/>
-                <a:cs typeface="+mn-cs"/>
-              </a:defRPr>
-            </a:lvl6pPr>
-            <a:lvl7pPr marL="2971800" indent="-228600" algn="l" defTabSz="457200" rtl="0" eaLnBrk="1" latinLnBrk="0" hangingPunct="1">
-              <a:spcBef>
-                <a:spcPts val="1000"/>
-              </a:spcBef>
-              <a:spcAft>
-                <a:spcPts val="0"/>
-              </a:spcAft>
-              <a:buClr>
-                <a:schemeClr val="accent1"/>
-              </a:buClr>
-              <a:buSzPct val="80000"/>
-              <a:buFont typeface="Wingdings 3" charset="2"/>
-              <a:buChar char=""/>
-              <a:defRPr sz="1200" kern="1200">
-                <a:solidFill>
-                  <a:schemeClr val="tx1">
-                    <a:lumMod val="75000"/>
-                    <a:lumOff val="25000"/>
-                  </a:schemeClr>
-                </a:solidFill>
-                <a:latin typeface="+mn-lt"/>
-                <a:ea typeface="+mn-ea"/>
-                <a:cs typeface="+mn-cs"/>
-              </a:defRPr>
-            </a:lvl7pPr>
-            <a:lvl8pPr marL="3429000" indent="-228600" algn="l" defTabSz="457200" rtl="0" eaLnBrk="1" latinLnBrk="0" hangingPunct="1">
-              <a:spcBef>
-                <a:spcPts val="1000"/>
-              </a:spcBef>
-              <a:spcAft>
-                <a:spcPts val="0"/>
-              </a:spcAft>
-              <a:buClr>
-                <a:schemeClr val="accent1"/>
-              </a:buClr>
-              <a:buSzPct val="80000"/>
-              <a:buFont typeface="Wingdings 3" charset="2"/>
-              <a:buChar char=""/>
-              <a:defRPr sz="1200" kern="1200">
-                <a:solidFill>
-                  <a:schemeClr val="tx1">
-                    <a:lumMod val="75000"/>
-                    <a:lumOff val="25000"/>
-                  </a:schemeClr>
-                </a:solidFill>
-                <a:latin typeface="+mn-lt"/>
-                <a:ea typeface="+mn-ea"/>
-                <a:cs typeface="+mn-cs"/>
-              </a:defRPr>
-            </a:lvl8pPr>
-            <a:lvl9pPr marL="3886200" indent="-228600" algn="l" defTabSz="457200" rtl="0" eaLnBrk="1" latinLnBrk="0" hangingPunct="1">
-              <a:spcBef>
-                <a:spcPts val="1000"/>
-              </a:spcBef>
-              <a:spcAft>
-                <a:spcPts val="0"/>
-              </a:spcAft>
-              <a:buClr>
-                <a:schemeClr val="accent1"/>
-              </a:buClr>
-              <a:buSzPct val="80000"/>
-              <a:buFont typeface="Wingdings 3" charset="2"/>
-              <a:buChar char=""/>
-              <a:defRPr sz="1200" kern="1200">
-                <a:solidFill>
-                  <a:schemeClr val="tx1">
-                    <a:lumMod val="75000"/>
-                    <a:lumOff val="25000"/>
-                  </a:schemeClr>
-                </a:solidFill>
-                <a:latin typeface="+mn-lt"/>
-                <a:ea typeface="+mn-ea"/>
-                <a:cs typeface="+mn-cs"/>
-              </a:defRPr>
-            </a:lvl9pPr>
-          </a:lstStyle>
-          <a:p>
-            <a:endParaRPr lang="en-GB" sz="2000" dirty="0"/>
-          </a:p>
-        </p:txBody>
-      </p:sp>
-      <p:pic>
-        <p:nvPicPr>
-          <p:cNvPr id="15" name="Picture 14">
-            <a:extLst>
-              <a:ext uri="{FF2B5EF4-FFF2-40B4-BE49-F238E27FC236}">
-                <a16:creationId xmlns:a16="http://schemas.microsoft.com/office/drawing/2014/main" id="{1DCBA495-6A60-126C-95E3-D6C64882C415}"/>
-              </a:ext>
-            </a:extLst>
-          </p:cNvPr>
-          <p:cNvPicPr>
-            <a:picLocks noChangeAspect="1"/>
-          </p:cNvPicPr>
-          <p:nvPr/>
-        </p:nvPicPr>
-        <p:blipFill>
-          <a:blip r:embed="rId3"/>
-          <a:srcRect r="65494" b="50092"/>
-          <a:stretch>
-            <a:fillRect/>
-          </a:stretch>
-        </p:blipFill>
-        <p:spPr>
-          <a:xfrm>
-            <a:off x="341358" y="1539473"/>
-            <a:ext cx="4502021" cy="4114877"/>
-          </a:xfrm>
-          <a:prstGeom prst="rect">
-            <a:avLst/>
-          </a:prstGeom>
-        </p:spPr>
-      </p:pic>
-      <p:pic>
-        <p:nvPicPr>
-          <p:cNvPr id="16" name="Picture 15">
-            <a:extLst>
-              <a:ext uri="{FF2B5EF4-FFF2-40B4-BE49-F238E27FC236}">
-                <a16:creationId xmlns:a16="http://schemas.microsoft.com/office/drawing/2014/main" id="{F3AD0B17-18D9-6090-3E04-BEAE2629A8FF}"/>
-              </a:ext>
-            </a:extLst>
-          </p:cNvPr>
-          <p:cNvPicPr>
-            <a:picLocks noChangeAspect="1"/>
-          </p:cNvPicPr>
-          <p:nvPr/>
-        </p:nvPicPr>
-        <p:blipFill>
-          <a:blip r:embed="rId3"/>
-          <a:srcRect l="33996" r="32662" b="50092"/>
-          <a:stretch>
-            <a:fillRect/>
-          </a:stretch>
-        </p:blipFill>
-        <p:spPr>
-          <a:xfrm>
-            <a:off x="5141933" y="1539473"/>
-            <a:ext cx="4413380" cy="4114877"/>
-          </a:xfrm>
-          <a:prstGeom prst="rect">
-            <a:avLst/>
-          </a:prstGeom>
-        </p:spPr>
-      </p:pic>
-      <p:sp>
-        <p:nvSpPr>
-          <p:cNvPr id="17" name="TextBox 16">
-            <a:extLst>
-              <a:ext uri="{FF2B5EF4-FFF2-40B4-BE49-F238E27FC236}">
-                <a16:creationId xmlns:a16="http://schemas.microsoft.com/office/drawing/2014/main" id="{E04A0BFC-9583-C368-8F55-19AFC5F83327}"/>
-              </a:ext>
-            </a:extLst>
-          </p:cNvPr>
-          <p:cNvSpPr txBox="1"/>
-          <p:nvPr/>
-        </p:nvSpPr>
-        <p:spPr>
-          <a:xfrm>
-            <a:off x="675957" y="5728997"/>
-            <a:ext cx="4042417" cy="923330"/>
-          </a:xfrm>
-          <a:prstGeom prst="rect">
-            <a:avLst/>
-          </a:prstGeom>
-          <a:noFill/>
-        </p:spPr>
-        <p:txBody>
-          <a:bodyPr wrap="square" rtlCol="0">
-            <a:spAutoFit/>
-          </a:bodyPr>
-          <a:lstStyle/>
-          <a:p>
-            <a:r>
-              <a:rPr lang="en-IN"/>
-              <a:t>Box plot of Seasonal Rainfall (mm) showing median, interquartile range (IQR), and mean markers.</a:t>
-            </a:r>
-          </a:p>
-        </p:txBody>
-      </p:sp>
-      <p:sp>
-        <p:nvSpPr>
-          <p:cNvPr id="18" name="TextBox 17">
-            <a:extLst>
-              <a:ext uri="{FF2B5EF4-FFF2-40B4-BE49-F238E27FC236}">
-                <a16:creationId xmlns:a16="http://schemas.microsoft.com/office/drawing/2014/main" id="{CD50CE3B-00FC-9760-5FC7-EFD2978A333D}"/>
-              </a:ext>
-            </a:extLst>
-          </p:cNvPr>
-          <p:cNvSpPr txBox="1"/>
-          <p:nvPr/>
-        </p:nvSpPr>
-        <p:spPr>
-          <a:xfrm>
-            <a:off x="5219785" y="5728997"/>
-            <a:ext cx="4257675" cy="923330"/>
-          </a:xfrm>
-          <a:prstGeom prst="rect">
-            <a:avLst/>
-          </a:prstGeom>
-          <a:noFill/>
-        </p:spPr>
-        <p:txBody>
-          <a:bodyPr wrap="square" rtlCol="0">
-            <a:spAutoFit/>
-          </a:bodyPr>
-          <a:lstStyle/>
-          <a:p>
-            <a:r>
-              <a:rPr lang="en-IN"/>
-              <a:t>Box plot of Seasonal Average Temperature (°C) across Kharif, Rabi, and Zaid.</a:t>
-            </a:r>
-          </a:p>
-        </p:txBody>
-      </p:sp>
-    </p:spTree>
-    <p:extLst>
-      <p:ext uri="{BB962C8B-B14F-4D97-AF65-F5344CB8AC3E}">
-        <p14:creationId xmlns:p14="http://schemas.microsoft.com/office/powerpoint/2010/main" val="3849627828"/>
       </p:ext>
     </p:extLst>
   </p:cSld>
@@ -29884,6 +30284,15 @@
 </file>
 
 <file path=customXml/item1.xml><?xml version="1.0" encoding="utf-8"?>
+<?mso-contentType ?>
+<FormTemplates xmlns="http://schemas.microsoft.com/sharepoint/v3/contenttype/forms">
+  <Display>DocumentLibraryForm</Display>
+  <Edit>DocumentLibraryForm</Edit>
+  <New>DocumentLibraryForm</New>
+</FormTemplates>
+</file>
+
+<file path=customXml/item2.xml><?xml version="1.0" encoding="utf-8"?>
 <ct:contentTypeSchema xmlns:ct="http://schemas.microsoft.com/office/2006/metadata/contentType" xmlns:ma="http://schemas.microsoft.com/office/2006/metadata/properties/metaAttributes" ct:_="" ma:_="" ma:contentTypeName="Document" ma:contentTypeID="0x01010079F111ED35F8CC479449609E8A0923A6" ma:contentTypeVersion="12" ma:contentTypeDescription="Create a new document." ma:contentTypeScope="" ma:versionID="426e97fa315356fffbdcd9876fe988c2">
   <xsd:schema xmlns:xsd="http://www.w3.org/2001/XMLSchema" xmlns:xs="http://www.w3.org/2001/XMLSchema" xmlns:p="http://schemas.microsoft.com/office/2006/metadata/properties" xmlns:ns2="71af3243-3dd4-4a8d-8c0d-dd76da1f02a5" xmlns:ns3="16c05727-aa75-4e4a-9b5f-8a80a1165891" targetNamespace="http://schemas.microsoft.com/office/2006/metadata/properties" ma:root="true" ma:fieldsID="14b8f0def80e6d70ce3def20c90759ae" ns2:_="" ns3:_="">
     <xsd:import namespace="71af3243-3dd4-4a8d-8c0d-dd76da1f02a5"/>
@@ -30104,15 +30513,6 @@
 </ct:contentTypeSchema>
 </file>
 
-<file path=customXml/item2.xml><?xml version="1.0" encoding="utf-8"?>
-<?mso-contentType ?>
-<FormTemplates xmlns="http://schemas.microsoft.com/sharepoint/v3/contenttype/forms">
-  <Display>DocumentLibraryForm</Display>
-  <Edit>DocumentLibraryForm</Edit>
-  <New>DocumentLibraryForm</New>
-</FormTemplates>
-</file>
-
 <file path=customXml/item3.xml><?xml version="1.0" encoding="utf-8"?>
 <p:properties xmlns:p="http://schemas.microsoft.com/office/2006/metadata/properties" xmlns:xsi="http://www.w3.org/2001/XMLSchema-instance" xmlns:pc="http://schemas.microsoft.com/office/infopath/2007/PartnerControls">
   <documentManagement>
@@ -30123,6 +30523,14 @@
 </file>
 
 <file path=customXml/itemProps1.xml><?xml version="1.0" encoding="utf-8"?>
+<ds:datastoreItem xmlns:ds="http://schemas.openxmlformats.org/officeDocument/2006/customXml" ds:itemID="{05D99ABA-76CE-4A8E-B5F0-C051B96628DE}">
+  <ds:schemaRefs>
+    <ds:schemaRef ds:uri="http://schemas.microsoft.com/sharepoint/v3/contenttype/forms"/>
+  </ds:schemaRefs>
+</ds:datastoreItem>
+</file>
+
+<file path=customXml/itemProps2.xml><?xml version="1.0" encoding="utf-8"?>
 <ds:datastoreItem xmlns:ds="http://schemas.openxmlformats.org/officeDocument/2006/customXml" ds:itemID="{B19EB750-A6DA-4BE8-B87B-FC499FE73360}">
   <ds:schemaRefs>
     <ds:schemaRef ds:uri="http://schemas.microsoft.com/office/2006/metadata/contentType"/>
@@ -30141,14 +30549,6 @@
 </ds:datastoreItem>
 </file>
 
-<file path=customXml/itemProps2.xml><?xml version="1.0" encoding="utf-8"?>
-<ds:datastoreItem xmlns:ds="http://schemas.openxmlformats.org/officeDocument/2006/customXml" ds:itemID="{05D99ABA-76CE-4A8E-B5F0-C051B96628DE}">
-  <ds:schemaRefs>
-    <ds:schemaRef ds:uri="http://schemas.microsoft.com/sharepoint/v3/contenttype/forms"/>
-  </ds:schemaRefs>
-</ds:datastoreItem>
-</file>
-
 <file path=customXml/itemProps3.xml><?xml version="1.0" encoding="utf-8"?>
 <ds:datastoreItem xmlns:ds="http://schemas.openxmlformats.org/officeDocument/2006/customXml" ds:itemID="{4DEA9014-ED64-4558-B1E1-D03F0EE32BEB}">
   <ds:schemaRefs>
